--- a/documentation/WarriorFit_Presentatie_10min_NL.pptx
+++ b/documentation/WarriorFit_Presentatie_10min_NL.pptx
@@ -5,25 +5,25 @@
     <p:sldMasterId id="2147483648" r:id="rId1"/>
   </p:sldMasterIdLst>
   <p:sldIdLst>
-    <p:sldId id="256" r:id="rId7"/>
-    <p:sldId id="257" r:id="rId8"/>
-    <p:sldId id="258" r:id="rId9"/>
-    <p:sldId id="259" r:id="rId10"/>
-    <p:sldId id="260" r:id="rId11"/>
-    <p:sldId id="261" r:id="rId12"/>
-    <p:sldId id="262" r:id="rId13"/>
-    <p:sldId id="263" r:id="rId14"/>
-    <p:sldId id="264" r:id="rId15"/>
-    <p:sldId id="265" r:id="rId16"/>
-    <p:sldId id="266" r:id="rId17"/>
-    <p:sldId id="267" r:id="rId18"/>
-    <p:sldId id="268" r:id="rId19"/>
-    <p:sldId id="269" r:id="rId20"/>
-    <p:sldId id="270" r:id="rId21"/>
-    <p:sldId id="271" r:id="rId22"/>
-    <p:sldId id="272" r:id="rId23"/>
+    <p:sldId id="256" r:id="rId2"/>
+    <p:sldId id="257" r:id="rId3"/>
+    <p:sldId id="258" r:id="rId4"/>
+    <p:sldId id="259" r:id="rId5"/>
+    <p:sldId id="260" r:id="rId6"/>
+    <p:sldId id="261" r:id="rId7"/>
+    <p:sldId id="262" r:id="rId8"/>
+    <p:sldId id="263" r:id="rId9"/>
+    <p:sldId id="264" r:id="rId10"/>
+    <p:sldId id="265" r:id="rId11"/>
+    <p:sldId id="266" r:id="rId12"/>
+    <p:sldId id="267" r:id="rId13"/>
+    <p:sldId id="268" r:id="rId14"/>
+    <p:sldId id="269" r:id="rId15"/>
+    <p:sldId id="270" r:id="rId16"/>
+    <p:sldId id="271" r:id="rId17"/>
+    <p:sldId id="272" r:id="rId18"/>
   </p:sldIdLst>
-  <p:sldSz cx="12188952" cy="6858000" type="screen4x3"/>
+  <p:sldSz cx="12188825" cy="6858000"/>
   <p:notesSz cx="6858000" cy="9144000"/>
   <p:defaultTextStyle>
     <a:defPPr>
@@ -120,6 +120,22 @@
       </a:defRPr>
     </a:lvl9pPr>
   </p:defaultTextStyle>
+  <p:extLst>
+    <p:ext uri="{EFAFB233-063F-42B5-8137-9DF3F51BA10A}">
+      <p15:sldGuideLst xmlns:p15="http://schemas.microsoft.com/office/powerpoint/2012/main">
+        <p15:guide id="1" orient="horz" pos="2160">
+          <p15:clr>
+            <a:srgbClr val="A4A3A4"/>
+          </p15:clr>
+        </p15:guide>
+        <p15:guide id="2" pos="2880">
+          <p15:clr>
+            <a:srgbClr val="A4A3A4"/>
+          </p15:clr>
+        </p15:guide>
+      </p15:sldGuideLst>
+    </p:ext>
+  </p:extLst>
 </p:presentation>
 </file>
 
@@ -161,10 +177,9 @@
           <a:lstStyle/>
           <a:p>
             <a:r>
-              <a:rPr lang="en-US" smtClean="0"/>
+              <a:rPr lang="en-US"/>
               <a:t>Click to edit Master title style</a:t>
             </a:r>
-            <a:endParaRPr lang="en-US"/>
           </a:p>
         </p:txBody>
       </p:sp>
@@ -280,10 +295,9 @@
           </a:lstStyle>
           <a:p>
             <a:r>
-              <a:rPr lang="en-US" smtClean="0"/>
+              <a:rPr lang="en-US"/>
               <a:t>Click to edit Master subtitle style</a:t>
             </a:r>
-            <a:endParaRPr lang="en-US"/>
           </a:p>
         </p:txBody>
       </p:sp>
@@ -304,7 +318,7 @@
           <a:p>
             <a:fld id="{5BCAD085-E8A6-8845-BD4E-CB4CCA059FC4}" type="datetimeFigureOut">
               <a:rPr lang="en-US" smtClean="0"/>
-              <a:t>1/27/13</a:t>
+              <a:t>5/31/26</a:t>
             </a:fld>
             <a:endParaRPr lang="en-US"/>
           </a:p>
@@ -398,10 +412,9 @@
           <a:lstStyle/>
           <a:p>
             <a:r>
-              <a:rPr lang="en-US" smtClean="0"/>
+              <a:rPr lang="en-US"/>
               <a:t>Click to edit Master title style</a:t>
             </a:r>
-            <a:endParaRPr lang="en-US"/>
           </a:p>
         </p:txBody>
       </p:sp>
@@ -422,38 +435,37 @@
           <a:p>
             <a:pPr lvl="0"/>
             <a:r>
-              <a:rPr lang="en-US" smtClean="0"/>
+              <a:rPr lang="en-US"/>
               <a:t>Click to edit Master text styles</a:t>
             </a:r>
           </a:p>
           <a:p>
             <a:pPr lvl="1"/>
             <a:r>
-              <a:rPr lang="en-US" smtClean="0"/>
+              <a:rPr lang="en-US"/>
               <a:t>Second level</a:t>
             </a:r>
           </a:p>
           <a:p>
             <a:pPr lvl="2"/>
             <a:r>
-              <a:rPr lang="en-US" smtClean="0"/>
+              <a:rPr lang="en-US"/>
               <a:t>Third level</a:t>
             </a:r>
           </a:p>
           <a:p>
             <a:pPr lvl="3"/>
             <a:r>
-              <a:rPr lang="en-US" smtClean="0"/>
+              <a:rPr lang="en-US"/>
               <a:t>Fourth level</a:t>
             </a:r>
           </a:p>
           <a:p>
             <a:pPr lvl="4"/>
             <a:r>
-              <a:rPr lang="en-US" smtClean="0"/>
+              <a:rPr lang="en-US"/>
               <a:t>Fifth level</a:t>
             </a:r>
-            <a:endParaRPr lang="en-US"/>
           </a:p>
         </p:txBody>
       </p:sp>
@@ -474,7 +486,7 @@
           <a:p>
             <a:fld id="{5BCAD085-E8A6-8845-BD4E-CB4CCA059FC4}" type="datetimeFigureOut">
               <a:rPr lang="en-US" smtClean="0"/>
-              <a:t>1/27/13</a:t>
+              <a:t>5/31/26</a:t>
             </a:fld>
             <a:endParaRPr lang="en-US"/>
           </a:p>
@@ -573,10 +585,9 @@
           <a:lstStyle/>
           <a:p>
             <a:r>
-              <a:rPr lang="en-US" smtClean="0"/>
+              <a:rPr lang="en-US"/>
               <a:t>Click to edit Master title style</a:t>
             </a:r>
-            <a:endParaRPr lang="en-US"/>
           </a:p>
         </p:txBody>
       </p:sp>
@@ -602,38 +613,37 @@
           <a:p>
             <a:pPr lvl="0"/>
             <a:r>
-              <a:rPr lang="en-US" smtClean="0"/>
+              <a:rPr lang="en-US"/>
               <a:t>Click to edit Master text styles</a:t>
             </a:r>
           </a:p>
           <a:p>
             <a:pPr lvl="1"/>
             <a:r>
-              <a:rPr lang="en-US" smtClean="0"/>
+              <a:rPr lang="en-US"/>
               <a:t>Second level</a:t>
             </a:r>
           </a:p>
           <a:p>
             <a:pPr lvl="2"/>
             <a:r>
-              <a:rPr lang="en-US" smtClean="0"/>
+              <a:rPr lang="en-US"/>
               <a:t>Third level</a:t>
             </a:r>
           </a:p>
           <a:p>
             <a:pPr lvl="3"/>
             <a:r>
-              <a:rPr lang="en-US" smtClean="0"/>
+              <a:rPr lang="en-US"/>
               <a:t>Fourth level</a:t>
             </a:r>
           </a:p>
           <a:p>
             <a:pPr lvl="4"/>
             <a:r>
-              <a:rPr lang="en-US" smtClean="0"/>
+              <a:rPr lang="en-US"/>
               <a:t>Fifth level</a:t>
             </a:r>
-            <a:endParaRPr lang="en-US"/>
           </a:p>
         </p:txBody>
       </p:sp>
@@ -654,7 +664,7 @@
           <a:p>
             <a:fld id="{5BCAD085-E8A6-8845-BD4E-CB4CCA059FC4}" type="datetimeFigureOut">
               <a:rPr lang="en-US" smtClean="0"/>
-              <a:t>1/27/13</a:t>
+              <a:t>5/31/26</a:t>
             </a:fld>
             <a:endParaRPr lang="en-US"/>
           </a:p>
@@ -748,10 +758,9 @@
           <a:lstStyle/>
           <a:p>
             <a:r>
-              <a:rPr lang="en-US" smtClean="0"/>
+              <a:rPr lang="en-US"/>
               <a:t>Click to edit Master title style</a:t>
             </a:r>
-            <a:endParaRPr lang="en-US"/>
           </a:p>
         </p:txBody>
       </p:sp>
@@ -772,38 +781,37 @@
           <a:p>
             <a:pPr lvl="0"/>
             <a:r>
-              <a:rPr lang="en-US" smtClean="0"/>
+              <a:rPr lang="en-US"/>
               <a:t>Click to edit Master text styles</a:t>
             </a:r>
           </a:p>
           <a:p>
             <a:pPr lvl="1"/>
             <a:r>
-              <a:rPr lang="en-US" smtClean="0"/>
+              <a:rPr lang="en-US"/>
               <a:t>Second level</a:t>
             </a:r>
           </a:p>
           <a:p>
             <a:pPr lvl="2"/>
             <a:r>
-              <a:rPr lang="en-US" smtClean="0"/>
+              <a:rPr lang="en-US"/>
               <a:t>Third level</a:t>
             </a:r>
           </a:p>
           <a:p>
             <a:pPr lvl="3"/>
             <a:r>
-              <a:rPr lang="en-US" smtClean="0"/>
+              <a:rPr lang="en-US"/>
               <a:t>Fourth level</a:t>
             </a:r>
           </a:p>
           <a:p>
             <a:pPr lvl="4"/>
             <a:r>
-              <a:rPr lang="en-US" smtClean="0"/>
+              <a:rPr lang="en-US"/>
               <a:t>Fifth level</a:t>
             </a:r>
-            <a:endParaRPr lang="en-US"/>
           </a:p>
         </p:txBody>
       </p:sp>
@@ -824,7 +832,7 @@
           <a:p>
             <a:fld id="{5BCAD085-E8A6-8845-BD4E-CB4CCA059FC4}" type="datetimeFigureOut">
               <a:rPr lang="en-US" smtClean="0"/>
-              <a:t>1/27/13</a:t>
+              <a:t>5/31/26</a:t>
             </a:fld>
             <a:endParaRPr lang="en-US"/>
           </a:p>
@@ -927,10 +935,9 @@
           </a:lstStyle>
           <a:p>
             <a:r>
-              <a:rPr lang="en-US" smtClean="0"/>
+              <a:rPr lang="en-US"/>
               <a:t>Click to edit Master title style</a:t>
             </a:r>
-            <a:endParaRPr lang="en-US"/>
           </a:p>
         </p:txBody>
       </p:sp>
@@ -1047,7 +1054,7 @@
           <a:p>
             <a:pPr lvl="0"/>
             <a:r>
-              <a:rPr lang="en-US" smtClean="0"/>
+              <a:rPr lang="en-US"/>
               <a:t>Click to edit Master text styles</a:t>
             </a:r>
           </a:p>
@@ -1070,7 +1077,7 @@
           <a:p>
             <a:fld id="{5BCAD085-E8A6-8845-BD4E-CB4CCA059FC4}" type="datetimeFigureOut">
               <a:rPr lang="en-US" smtClean="0"/>
-              <a:t>1/27/13</a:t>
+              <a:t>5/31/26</a:t>
             </a:fld>
             <a:endParaRPr lang="en-US"/>
           </a:p>
@@ -1164,10 +1171,9 @@
           <a:lstStyle/>
           <a:p>
             <a:r>
-              <a:rPr lang="en-US" smtClean="0"/>
+              <a:rPr lang="en-US"/>
               <a:t>Click to edit Master title style</a:t>
             </a:r>
-            <a:endParaRPr lang="en-US"/>
           </a:p>
         </p:txBody>
       </p:sp>
@@ -1221,38 +1227,37 @@
           <a:p>
             <a:pPr lvl="0"/>
             <a:r>
-              <a:rPr lang="en-US" smtClean="0"/>
+              <a:rPr lang="en-US"/>
               <a:t>Click to edit Master text styles</a:t>
             </a:r>
           </a:p>
           <a:p>
             <a:pPr lvl="1"/>
             <a:r>
-              <a:rPr lang="en-US" smtClean="0"/>
+              <a:rPr lang="en-US"/>
               <a:t>Second level</a:t>
             </a:r>
           </a:p>
           <a:p>
             <a:pPr lvl="2"/>
             <a:r>
-              <a:rPr lang="en-US" smtClean="0"/>
+              <a:rPr lang="en-US"/>
               <a:t>Third level</a:t>
             </a:r>
           </a:p>
           <a:p>
             <a:pPr lvl="3"/>
             <a:r>
-              <a:rPr lang="en-US" smtClean="0"/>
+              <a:rPr lang="en-US"/>
               <a:t>Fourth level</a:t>
             </a:r>
           </a:p>
           <a:p>
             <a:pPr lvl="4"/>
             <a:r>
-              <a:rPr lang="en-US" smtClean="0"/>
+              <a:rPr lang="en-US"/>
               <a:t>Fifth level</a:t>
             </a:r>
-            <a:endParaRPr lang="en-US"/>
           </a:p>
         </p:txBody>
       </p:sp>
@@ -1306,38 +1311,37 @@
           <a:p>
             <a:pPr lvl="0"/>
             <a:r>
-              <a:rPr lang="en-US" smtClean="0"/>
+              <a:rPr lang="en-US"/>
               <a:t>Click to edit Master text styles</a:t>
             </a:r>
           </a:p>
           <a:p>
             <a:pPr lvl="1"/>
             <a:r>
-              <a:rPr lang="en-US" smtClean="0"/>
+              <a:rPr lang="en-US"/>
               <a:t>Second level</a:t>
             </a:r>
           </a:p>
           <a:p>
             <a:pPr lvl="2"/>
             <a:r>
-              <a:rPr lang="en-US" smtClean="0"/>
+              <a:rPr lang="en-US"/>
               <a:t>Third level</a:t>
             </a:r>
           </a:p>
           <a:p>
             <a:pPr lvl="3"/>
             <a:r>
-              <a:rPr lang="en-US" smtClean="0"/>
+              <a:rPr lang="en-US"/>
               <a:t>Fourth level</a:t>
             </a:r>
           </a:p>
           <a:p>
             <a:pPr lvl="4"/>
             <a:r>
-              <a:rPr lang="en-US" smtClean="0"/>
+              <a:rPr lang="en-US"/>
               <a:t>Fifth level</a:t>
             </a:r>
-            <a:endParaRPr lang="en-US"/>
           </a:p>
         </p:txBody>
       </p:sp>
@@ -1358,7 +1362,7 @@
           <a:p>
             <a:fld id="{5BCAD085-E8A6-8845-BD4E-CB4CCA059FC4}" type="datetimeFigureOut">
               <a:rPr lang="en-US" smtClean="0"/>
-              <a:t>1/27/13</a:t>
+              <a:t>5/31/26</a:t>
             </a:fld>
             <a:endParaRPr lang="en-US"/>
           </a:p>
@@ -1456,10 +1460,9 @@
           </a:lstStyle>
           <a:p>
             <a:r>
-              <a:rPr lang="en-US" smtClean="0"/>
+              <a:rPr lang="en-US"/>
               <a:t>Click to edit Master title style</a:t>
             </a:r>
-            <a:endParaRPr lang="en-US"/>
           </a:p>
         </p:txBody>
       </p:sp>
@@ -1522,7 +1525,7 @@
           <a:p>
             <a:pPr lvl="0"/>
             <a:r>
-              <a:rPr lang="en-US" smtClean="0"/>
+              <a:rPr lang="en-US"/>
               <a:t>Click to edit Master text styles</a:t>
             </a:r>
           </a:p>
@@ -1578,38 +1581,37 @@
           <a:p>
             <a:pPr lvl="0"/>
             <a:r>
-              <a:rPr lang="en-US" smtClean="0"/>
+              <a:rPr lang="en-US"/>
               <a:t>Click to edit Master text styles</a:t>
             </a:r>
           </a:p>
           <a:p>
             <a:pPr lvl="1"/>
             <a:r>
-              <a:rPr lang="en-US" smtClean="0"/>
+              <a:rPr lang="en-US"/>
               <a:t>Second level</a:t>
             </a:r>
           </a:p>
           <a:p>
             <a:pPr lvl="2"/>
             <a:r>
-              <a:rPr lang="en-US" smtClean="0"/>
+              <a:rPr lang="en-US"/>
               <a:t>Third level</a:t>
             </a:r>
           </a:p>
           <a:p>
             <a:pPr lvl="3"/>
             <a:r>
-              <a:rPr lang="en-US" smtClean="0"/>
+              <a:rPr lang="en-US"/>
               <a:t>Fourth level</a:t>
             </a:r>
           </a:p>
           <a:p>
             <a:pPr lvl="4"/>
             <a:r>
-              <a:rPr lang="en-US" smtClean="0"/>
+              <a:rPr lang="en-US"/>
               <a:t>Fifth level</a:t>
             </a:r>
-            <a:endParaRPr lang="en-US"/>
           </a:p>
         </p:txBody>
       </p:sp>
@@ -1672,7 +1674,7 @@
           <a:p>
             <a:pPr lvl="0"/>
             <a:r>
-              <a:rPr lang="en-US" smtClean="0"/>
+              <a:rPr lang="en-US"/>
               <a:t>Click to edit Master text styles</a:t>
             </a:r>
           </a:p>
@@ -1728,38 +1730,37 @@
           <a:p>
             <a:pPr lvl="0"/>
             <a:r>
-              <a:rPr lang="en-US" smtClean="0"/>
+              <a:rPr lang="en-US"/>
               <a:t>Click to edit Master text styles</a:t>
             </a:r>
           </a:p>
           <a:p>
             <a:pPr lvl="1"/>
             <a:r>
-              <a:rPr lang="en-US" smtClean="0"/>
+              <a:rPr lang="en-US"/>
               <a:t>Second level</a:t>
             </a:r>
           </a:p>
           <a:p>
             <a:pPr lvl="2"/>
             <a:r>
-              <a:rPr lang="en-US" smtClean="0"/>
+              <a:rPr lang="en-US"/>
               <a:t>Third level</a:t>
             </a:r>
           </a:p>
           <a:p>
             <a:pPr lvl="3"/>
             <a:r>
-              <a:rPr lang="en-US" smtClean="0"/>
+              <a:rPr lang="en-US"/>
               <a:t>Fourth level</a:t>
             </a:r>
           </a:p>
           <a:p>
             <a:pPr lvl="4"/>
             <a:r>
-              <a:rPr lang="en-US" smtClean="0"/>
+              <a:rPr lang="en-US"/>
               <a:t>Fifth level</a:t>
             </a:r>
-            <a:endParaRPr lang="en-US"/>
           </a:p>
         </p:txBody>
       </p:sp>
@@ -1780,7 +1781,7 @@
           <a:p>
             <a:fld id="{5BCAD085-E8A6-8845-BD4E-CB4CCA059FC4}" type="datetimeFigureOut">
               <a:rPr lang="en-US" smtClean="0"/>
-              <a:t>1/27/13</a:t>
+              <a:t>5/31/26</a:t>
             </a:fld>
             <a:endParaRPr lang="en-US"/>
           </a:p>
@@ -1874,10 +1875,9 @@
           <a:lstStyle/>
           <a:p>
             <a:r>
-              <a:rPr lang="en-US" smtClean="0"/>
+              <a:rPr lang="en-US"/>
               <a:t>Click to edit Master title style</a:t>
             </a:r>
-            <a:endParaRPr lang="en-US"/>
           </a:p>
         </p:txBody>
       </p:sp>
@@ -1898,7 +1898,7 @@
           <a:p>
             <a:fld id="{5BCAD085-E8A6-8845-BD4E-CB4CCA059FC4}" type="datetimeFigureOut">
               <a:rPr lang="en-US" smtClean="0"/>
-              <a:t>1/27/13</a:t>
+              <a:t>5/31/26</a:t>
             </a:fld>
             <a:endParaRPr lang="en-US"/>
           </a:p>
@@ -1993,7 +1993,7 @@
           <a:p>
             <a:fld id="{5BCAD085-E8A6-8845-BD4E-CB4CCA059FC4}" type="datetimeFigureOut">
               <a:rPr lang="en-US" smtClean="0"/>
-              <a:t>1/27/13</a:t>
+              <a:t>5/31/26</a:t>
             </a:fld>
             <a:endParaRPr lang="en-US"/>
           </a:p>
@@ -2096,10 +2096,9 @@
           </a:lstStyle>
           <a:p>
             <a:r>
-              <a:rPr lang="en-US" smtClean="0"/>
+              <a:rPr lang="en-US"/>
               <a:t>Click to edit Master title style</a:t>
             </a:r>
-            <a:endParaRPr lang="en-US"/>
           </a:p>
         </p:txBody>
       </p:sp>
@@ -2153,38 +2152,37 @@
           <a:p>
             <a:pPr lvl="0"/>
             <a:r>
-              <a:rPr lang="en-US" smtClean="0"/>
+              <a:rPr lang="en-US"/>
               <a:t>Click to edit Master text styles</a:t>
             </a:r>
           </a:p>
           <a:p>
             <a:pPr lvl="1"/>
             <a:r>
-              <a:rPr lang="en-US" smtClean="0"/>
+              <a:rPr lang="en-US"/>
               <a:t>Second level</a:t>
             </a:r>
           </a:p>
           <a:p>
             <a:pPr lvl="2"/>
             <a:r>
-              <a:rPr lang="en-US" smtClean="0"/>
+              <a:rPr lang="en-US"/>
               <a:t>Third level</a:t>
             </a:r>
           </a:p>
           <a:p>
             <a:pPr lvl="3"/>
             <a:r>
-              <a:rPr lang="en-US" smtClean="0"/>
+              <a:rPr lang="en-US"/>
               <a:t>Fourth level</a:t>
             </a:r>
           </a:p>
           <a:p>
             <a:pPr lvl="4"/>
             <a:r>
-              <a:rPr lang="en-US" smtClean="0"/>
+              <a:rPr lang="en-US"/>
               <a:t>Fifth level</a:t>
             </a:r>
-            <a:endParaRPr lang="en-US"/>
           </a:p>
         </p:txBody>
       </p:sp>
@@ -2247,7 +2245,7 @@
           <a:p>
             <a:pPr lvl="0"/>
             <a:r>
-              <a:rPr lang="en-US" smtClean="0"/>
+              <a:rPr lang="en-US"/>
               <a:t>Click to edit Master text styles</a:t>
             </a:r>
           </a:p>
@@ -2270,7 +2268,7 @@
           <a:p>
             <a:fld id="{5BCAD085-E8A6-8845-BD4E-CB4CCA059FC4}" type="datetimeFigureOut">
               <a:rPr lang="en-US" smtClean="0"/>
-              <a:t>1/27/13</a:t>
+              <a:t>5/31/26</a:t>
             </a:fld>
             <a:endParaRPr lang="en-US"/>
           </a:p>
@@ -2373,10 +2371,9 @@
           </a:lstStyle>
           <a:p>
             <a:r>
-              <a:rPr lang="en-US" smtClean="0"/>
+              <a:rPr lang="en-US"/>
               <a:t>Click to edit Master title style</a:t>
             </a:r>
-            <a:endParaRPr lang="en-US"/>
           </a:p>
         </p:txBody>
       </p:sp>
@@ -2500,7 +2497,7 @@
           <a:p>
             <a:pPr lvl="0"/>
             <a:r>
-              <a:rPr lang="en-US" smtClean="0"/>
+              <a:rPr lang="en-US"/>
               <a:t>Click to edit Master text styles</a:t>
             </a:r>
           </a:p>
@@ -2523,7 +2520,7 @@
           <a:p>
             <a:fld id="{5BCAD085-E8A6-8845-BD4E-CB4CCA059FC4}" type="datetimeFigureOut">
               <a:rPr lang="en-US" smtClean="0"/>
-              <a:t>1/27/13</a:t>
+              <a:t>5/31/26</a:t>
             </a:fld>
             <a:endParaRPr lang="en-US"/>
           </a:p>
@@ -2632,10 +2629,9 @@
           <a:lstStyle/>
           <a:p>
             <a:r>
-              <a:rPr lang="en-US" smtClean="0"/>
+              <a:rPr lang="en-US"/>
               <a:t>Click to edit Master title style</a:t>
             </a:r>
-            <a:endParaRPr lang="en-US"/>
           </a:p>
         </p:txBody>
       </p:sp>
@@ -2666,38 +2662,37 @@
           <a:p>
             <a:pPr lvl="0"/>
             <a:r>
-              <a:rPr lang="en-US" smtClean="0"/>
+              <a:rPr lang="en-US"/>
               <a:t>Click to edit Master text styles</a:t>
             </a:r>
           </a:p>
           <a:p>
             <a:pPr lvl="1"/>
             <a:r>
-              <a:rPr lang="en-US" smtClean="0"/>
+              <a:rPr lang="en-US"/>
               <a:t>Second level</a:t>
             </a:r>
           </a:p>
           <a:p>
             <a:pPr lvl="2"/>
             <a:r>
-              <a:rPr lang="en-US" smtClean="0"/>
+              <a:rPr lang="en-US"/>
               <a:t>Third level</a:t>
             </a:r>
           </a:p>
           <a:p>
             <a:pPr lvl="3"/>
             <a:r>
-              <a:rPr lang="en-US" smtClean="0"/>
+              <a:rPr lang="en-US"/>
               <a:t>Fourth level</a:t>
             </a:r>
           </a:p>
           <a:p>
             <a:pPr lvl="4"/>
             <a:r>
-              <a:rPr lang="en-US" smtClean="0"/>
+              <a:rPr lang="en-US"/>
               <a:t>Fifth level</a:t>
             </a:r>
-            <a:endParaRPr lang="en-US"/>
           </a:p>
         </p:txBody>
       </p:sp>
@@ -2736,7 +2731,7 @@
           <a:p>
             <a:fld id="{5BCAD085-E8A6-8845-BD4E-CB4CCA059FC4}" type="datetimeFigureOut">
               <a:rPr lang="en-US" smtClean="0"/>
-              <a:t>1/27/13</a:t>
+              <a:t>5/31/26</a:t>
             </a:fld>
             <a:endParaRPr lang="en-US"/>
           </a:p>
@@ -3095,7 +3090,7 @@
 </file>
 
 <file path=ppt/slides/slide1.xml><?xml version="1.0" encoding="utf-8"?>
-<p:sld xmlns:a="http://schemas.openxmlformats.org/drawingml/2006/main" xmlns:p="http://schemas.openxmlformats.org/presentationml/2006/main" xmlns:r="http://schemas.openxmlformats.org/officeDocument/2006/relationships">
+<p:sld xmlns:a="http://schemas.openxmlformats.org/drawingml/2006/main" xmlns:r="http://schemas.openxmlformats.org/officeDocument/2006/relationships" xmlns:p="http://schemas.openxmlformats.org/presentationml/2006/main">
   <p:cSld>
     <p:bg>
       <p:bgPr>
@@ -3111,7 +3106,14 @@
         <p:cNvGrpSpPr/>
         <p:nvPr/>
       </p:nvGrpSpPr>
-      <p:grpSpPr/>
+      <p:grpSpPr>
+        <a:xfrm>
+          <a:off x="0" y="0"/>
+          <a:ext cx="0" cy="0"/>
+          <a:chOff x="0" y="0"/>
+          <a:chExt cx="0" cy="0"/>
+        </a:xfrm>
+      </p:grpSpPr>
       <p:sp>
         <p:nvSpPr>
           <p:cNvPr id="2" name="Rectangle 1"/>
@@ -3120,7 +3122,7 @@
         </p:nvSpPr>
         <p:spPr>
           <a:xfrm>
-            <a:off x="457200" y="1371600"/>
+            <a:off x="443484" y="777240"/>
             <a:ext cx="11274552" cy="4389120"/>
           </a:xfrm>
           <a:prstGeom prst="rect">
@@ -3152,6 +3154,7 @@
           <a:lstStyle/>
           <a:p>
             <a:pPr algn="ctr"/>
+            <a:endParaRPr/>
           </a:p>
         </p:txBody>
       </p:sp>
@@ -3335,6 +3338,7 @@
           <a:lstStyle/>
           <a:p>
             <a:pPr algn="ctr"/>
+            <a:endParaRPr/>
           </a:p>
         </p:txBody>
       </p:sp>
@@ -3448,6 +3452,7 @@
           <a:lstStyle/>
           <a:p>
             <a:pPr algn="ctr"/>
+            <a:endParaRPr/>
           </a:p>
         </p:txBody>
       </p:sp>
@@ -3561,6 +3566,7 @@
           <a:lstStyle/>
           <a:p>
             <a:pPr algn="ctr"/>
+            <a:endParaRPr/>
           </a:p>
         </p:txBody>
       </p:sp>
@@ -3674,6 +3680,7 @@
           <a:lstStyle/>
           <a:p>
             <a:pPr algn="ctr"/>
+            <a:endParaRPr/>
           </a:p>
         </p:txBody>
       </p:sp>
@@ -3787,6 +3794,7 @@
           <a:lstStyle/>
           <a:p>
             <a:pPr algn="ctr"/>
+            <a:endParaRPr/>
           </a:p>
         </p:txBody>
       </p:sp>
@@ -3869,7 +3877,7 @@
 </file>
 
 <file path=ppt/slides/slide10.xml><?xml version="1.0" encoding="utf-8"?>
-<p:sld xmlns:a="http://schemas.openxmlformats.org/drawingml/2006/main" xmlns:p="http://schemas.openxmlformats.org/presentationml/2006/main" xmlns:r="http://schemas.openxmlformats.org/officeDocument/2006/relationships">
+<p:sld xmlns:a="http://schemas.openxmlformats.org/drawingml/2006/main" xmlns:r="http://schemas.openxmlformats.org/officeDocument/2006/relationships" xmlns:p="http://schemas.openxmlformats.org/presentationml/2006/main">
   <p:cSld>
     <p:bg>
       <p:bgPr>
@@ -3885,7 +3893,14 @@
         <p:cNvGrpSpPr/>
         <p:nvPr/>
       </p:nvGrpSpPr>
-      <p:grpSpPr/>
+      <p:grpSpPr>
+        <a:xfrm>
+          <a:off x="0" y="0"/>
+          <a:ext cx="0" cy="0"/>
+          <a:chOff x="0" y="0"/>
+          <a:chExt cx="0" cy="0"/>
+        </a:xfrm>
+      </p:grpSpPr>
       <p:sp>
         <p:nvSpPr>
           <p:cNvPr id="2" name="Rectangle 1"/>
@@ -3926,6 +3941,7 @@
           <a:lstStyle/>
           <a:p>
             <a:pPr algn="ctr"/>
+            <a:endParaRPr/>
           </a:p>
         </p:txBody>
       </p:sp>
@@ -4067,7 +4083,7 @@
 </file>
 
 <file path=ppt/slides/slide11.xml><?xml version="1.0" encoding="utf-8"?>
-<p:sld xmlns:a="http://schemas.openxmlformats.org/drawingml/2006/main" xmlns:p="http://schemas.openxmlformats.org/presentationml/2006/main" xmlns:r="http://schemas.openxmlformats.org/officeDocument/2006/relationships">
+<p:sld xmlns:a="http://schemas.openxmlformats.org/drawingml/2006/main" xmlns:r="http://schemas.openxmlformats.org/officeDocument/2006/relationships" xmlns:p="http://schemas.openxmlformats.org/presentationml/2006/main">
   <p:cSld>
     <p:bg>
       <p:bgPr>
@@ -4083,7 +4099,14 @@
         <p:cNvGrpSpPr/>
         <p:nvPr/>
       </p:nvGrpSpPr>
-      <p:grpSpPr/>
+      <p:grpSpPr>
+        <a:xfrm>
+          <a:off x="0" y="0"/>
+          <a:ext cx="0" cy="0"/>
+          <a:chOff x="0" y="0"/>
+          <a:chExt cx="0" cy="0"/>
+        </a:xfrm>
+      </p:grpSpPr>
       <p:sp>
         <p:nvSpPr>
           <p:cNvPr id="2" name="Rectangle 1"/>
@@ -4124,6 +4147,7 @@
           <a:lstStyle/>
           <a:p>
             <a:pPr algn="ctr"/>
+            <a:endParaRPr/>
           </a:p>
         </p:txBody>
       </p:sp>
@@ -4237,6 +4261,7 @@
           <a:lstStyle/>
           <a:p>
             <a:pPr algn="ctr"/>
+            <a:endParaRPr/>
           </a:p>
         </p:txBody>
       </p:sp>
@@ -4350,6 +4375,7 @@
           <a:lstStyle/>
           <a:p>
             <a:pPr algn="ctr"/>
+            <a:endParaRPr/>
           </a:p>
         </p:txBody>
       </p:sp>
@@ -4463,6 +4489,7 @@
           <a:lstStyle/>
           <a:p>
             <a:pPr algn="ctr"/>
+            <a:endParaRPr/>
           </a:p>
         </p:txBody>
       </p:sp>
@@ -4576,6 +4603,7 @@
           <a:lstStyle/>
           <a:p>
             <a:pPr algn="ctr"/>
+            <a:endParaRPr/>
           </a:p>
         </p:txBody>
       </p:sp>
@@ -4689,6 +4717,7 @@
           <a:lstStyle/>
           <a:p>
             <a:pPr algn="ctr"/>
+            <a:endParaRPr/>
           </a:p>
         </p:txBody>
       </p:sp>
@@ -4802,6 +4831,7 @@
           <a:lstStyle/>
           <a:p>
             <a:pPr algn="ctr"/>
+            <a:endParaRPr/>
           </a:p>
         </p:txBody>
       </p:sp>
@@ -4894,11 +4924,41 @@
                 <a:tableStyleId>{5C22544A-7EE6-4342-B048-85BDC9FD1C3A}</a:tableStyleId>
               </a:tblPr>
               <a:tblGrid>
-                <a:gridCol w="822960"/>
-                <a:gridCol w="1371600"/>
-                <a:gridCol w="640080"/>
-                <a:gridCol w="777240"/>
-                <a:gridCol w="4434840"/>
+                <a:gridCol w="822960">
+                  <a:extLst>
+                    <a:ext uri="{9D8B030D-6E8A-4147-A177-3AD203B41FA5}">
+                      <a16:colId xmlns:a16="http://schemas.microsoft.com/office/drawing/2014/main" val="20000"/>
+                    </a:ext>
+                  </a:extLst>
+                </a:gridCol>
+                <a:gridCol w="1371600">
+                  <a:extLst>
+                    <a:ext uri="{9D8B030D-6E8A-4147-A177-3AD203B41FA5}">
+                      <a16:colId xmlns:a16="http://schemas.microsoft.com/office/drawing/2014/main" val="20001"/>
+                    </a:ext>
+                  </a:extLst>
+                </a:gridCol>
+                <a:gridCol w="640080">
+                  <a:extLst>
+                    <a:ext uri="{9D8B030D-6E8A-4147-A177-3AD203B41FA5}">
+                      <a16:colId xmlns:a16="http://schemas.microsoft.com/office/drawing/2014/main" val="20002"/>
+                    </a:ext>
+                  </a:extLst>
+                </a:gridCol>
+                <a:gridCol w="777240">
+                  <a:extLst>
+                    <a:ext uri="{9D8B030D-6E8A-4147-A177-3AD203B41FA5}">
+                      <a16:colId xmlns:a16="http://schemas.microsoft.com/office/drawing/2014/main" val="20003"/>
+                    </a:ext>
+                  </a:extLst>
+                </a:gridCol>
+                <a:gridCol w="4434840">
+                  <a:extLst>
+                    <a:ext uri="{9D8B030D-6E8A-4147-A177-3AD203B41FA5}">
+                      <a16:colId xmlns:a16="http://schemas.microsoft.com/office/drawing/2014/main" val="20004"/>
+                    </a:ext>
+                  </a:extLst>
+                </a:gridCol>
               </a:tblGrid>
               <a:tr h="491490">
                 <a:tc>
@@ -4908,7 +4968,7 @@
                     <a:p>
                       <a:pPr algn="ctr"/>
                       <a:r>
-                        <a:rPr b="1" sz="1400">
+                        <a:rPr sz="1400" b="1">
                           <a:solidFill>
                             <a:srgbClr val="C8A020"/>
                           </a:solidFill>
@@ -4918,7 +4978,7 @@
                       </a:r>
                     </a:p>
                   </a:txBody>
-                  <a:tcPr marT="38100" marB="38100" marL="63500" marR="63500">
+                  <a:tcPr marL="63500" marR="63500" marT="38100" marB="38100">
                     <a:solidFill>
                       <a:srgbClr val="3A5A3A"/>
                     </a:solidFill>
@@ -4931,7 +4991,7 @@
                     <a:p>
                       <a:pPr algn="ctr"/>
                       <a:r>
-                        <a:rPr b="1" sz="1400">
+                        <a:rPr sz="1400" b="1">
                           <a:solidFill>
                             <a:srgbClr val="C8A020"/>
                           </a:solidFill>
@@ -4941,7 +5001,7 @@
                       </a:r>
                     </a:p>
                   </a:txBody>
-                  <a:tcPr marT="38100" marB="38100" marL="63500" marR="63500">
+                  <a:tcPr marL="63500" marR="63500" marT="38100" marB="38100">
                     <a:solidFill>
                       <a:srgbClr val="3A5A3A"/>
                     </a:solidFill>
@@ -4954,7 +5014,7 @@
                     <a:p>
                       <a:pPr algn="ctr"/>
                       <a:r>
-                        <a:rPr b="1" sz="1400">
+                        <a:rPr sz="1400" b="1">
                           <a:solidFill>
                             <a:srgbClr val="C8A020"/>
                           </a:solidFill>
@@ -4964,7 +5024,7 @@
                       </a:r>
                     </a:p>
                   </a:txBody>
-                  <a:tcPr marT="38100" marB="38100" marL="63500" marR="63500">
+                  <a:tcPr marL="63500" marR="63500" marT="38100" marB="38100">
                     <a:solidFill>
                       <a:srgbClr val="3A5A3A"/>
                     </a:solidFill>
@@ -4977,7 +5037,7 @@
                     <a:p>
                       <a:pPr algn="ctr"/>
                       <a:r>
-                        <a:rPr b="1" sz="1400">
+                        <a:rPr sz="1400" b="1">
                           <a:solidFill>
                             <a:srgbClr val="C8A020"/>
                           </a:solidFill>
@@ -4987,7 +5047,7 @@
                       </a:r>
                     </a:p>
                   </a:txBody>
-                  <a:tcPr marT="38100" marB="38100" marL="63500" marR="63500">
+                  <a:tcPr marL="63500" marR="63500" marT="38100" marB="38100">
                     <a:solidFill>
                       <a:srgbClr val="3A5A3A"/>
                     </a:solidFill>
@@ -5000,7 +5060,7 @@
                     <a:p>
                       <a:pPr algn="ctr"/>
                       <a:r>
-                        <a:rPr b="1" sz="1400">
+                        <a:rPr sz="1400" b="1">
                           <a:solidFill>
                             <a:srgbClr val="C8A020"/>
                           </a:solidFill>
@@ -5010,12 +5070,17 @@
                       </a:r>
                     </a:p>
                   </a:txBody>
-                  <a:tcPr marT="38100" marB="38100" marL="63500" marR="63500">
+                  <a:tcPr marL="63500" marR="63500" marT="38100" marB="38100">
                     <a:solidFill>
                       <a:srgbClr val="3A5A3A"/>
                     </a:solidFill>
                   </a:tcPr>
                 </a:tc>
+                <a:extLst>
+                  <a:ext uri="{0D108BD9-81ED-4DB2-BD59-A6C34878D82A}">
+                    <a16:rowId xmlns:a16="http://schemas.microsoft.com/office/drawing/2014/main" val="10000"/>
+                  </a:ext>
+                </a:extLst>
               </a:tr>
               <a:tr h="491490">
                 <a:tc>
@@ -5035,7 +5100,7 @@
                       </a:r>
                     </a:p>
                   </a:txBody>
-                  <a:tcPr marT="38100" marB="38100" marL="63500" marR="63500">
+                  <a:tcPr marL="63500" marR="63500" marT="38100" marB="38100">
                     <a:solidFill>
                       <a:srgbClr val="243824"/>
                     </a:solidFill>
@@ -5058,7 +5123,7 @@
                       </a:r>
                     </a:p>
                   </a:txBody>
-                  <a:tcPr marT="38100" marB="38100" marL="63500" marR="63500">
+                  <a:tcPr marL="63500" marR="63500" marT="38100" marB="38100">
                     <a:solidFill>
                       <a:srgbClr val="243824"/>
                     </a:solidFill>
@@ -5081,7 +5146,7 @@
                       </a:r>
                     </a:p>
                   </a:txBody>
-                  <a:tcPr marT="38100" marB="38100" marL="63500" marR="63500">
+                  <a:tcPr marL="63500" marR="63500" marT="38100" marB="38100">
                     <a:solidFill>
                       <a:srgbClr val="243824"/>
                     </a:solidFill>
@@ -5104,7 +5169,7 @@
                       </a:r>
                     </a:p>
                   </a:txBody>
-                  <a:tcPr marT="38100" marB="38100" marL="63500" marR="63500">
+                  <a:tcPr marL="63500" marR="63500" marT="38100" marB="38100">
                     <a:solidFill>
                       <a:srgbClr val="243824"/>
                     </a:solidFill>
@@ -5127,12 +5192,17 @@
                       </a:r>
                     </a:p>
                   </a:txBody>
-                  <a:tcPr marT="38100" marB="38100" marL="63500" marR="63500">
+                  <a:tcPr marL="63500" marR="63500" marT="38100" marB="38100">
                     <a:solidFill>
                       <a:srgbClr val="243824"/>
                     </a:solidFill>
                   </a:tcPr>
                 </a:tc>
+                <a:extLst>
+                  <a:ext uri="{0D108BD9-81ED-4DB2-BD59-A6C34878D82A}">
+                    <a16:rowId xmlns:a16="http://schemas.microsoft.com/office/drawing/2014/main" val="10001"/>
+                  </a:ext>
+                </a:extLst>
               </a:tr>
               <a:tr h="491490">
                 <a:tc>
@@ -5152,7 +5222,7 @@
                       </a:r>
                     </a:p>
                   </a:txBody>
-                  <a:tcPr marT="38100" marB="38100" marL="63500" marR="63500">
+                  <a:tcPr marL="63500" marR="63500" marT="38100" marB="38100">
                     <a:solidFill>
                       <a:srgbClr val="2A402A"/>
                     </a:solidFill>
@@ -5175,7 +5245,7 @@
                       </a:r>
                     </a:p>
                   </a:txBody>
-                  <a:tcPr marT="38100" marB="38100" marL="63500" marR="63500">
+                  <a:tcPr marL="63500" marR="63500" marT="38100" marB="38100">
                     <a:solidFill>
                       <a:srgbClr val="2A402A"/>
                     </a:solidFill>
@@ -5198,7 +5268,7 @@
                       </a:r>
                     </a:p>
                   </a:txBody>
-                  <a:tcPr marT="38100" marB="38100" marL="63500" marR="63500">
+                  <a:tcPr marL="63500" marR="63500" marT="38100" marB="38100">
                     <a:solidFill>
                       <a:srgbClr val="2A402A"/>
                     </a:solidFill>
@@ -5221,7 +5291,7 @@
                       </a:r>
                     </a:p>
                   </a:txBody>
-                  <a:tcPr marT="38100" marB="38100" marL="63500" marR="63500">
+                  <a:tcPr marL="63500" marR="63500" marT="38100" marB="38100">
                     <a:solidFill>
                       <a:srgbClr val="2A402A"/>
                     </a:solidFill>
@@ -5244,12 +5314,17 @@
                       </a:r>
                     </a:p>
                   </a:txBody>
-                  <a:tcPr marT="38100" marB="38100" marL="63500" marR="63500">
+                  <a:tcPr marL="63500" marR="63500" marT="38100" marB="38100">
                     <a:solidFill>
                       <a:srgbClr val="2A402A"/>
                     </a:solidFill>
                   </a:tcPr>
                 </a:tc>
+                <a:extLst>
+                  <a:ext uri="{0D108BD9-81ED-4DB2-BD59-A6C34878D82A}">
+                    <a16:rowId xmlns:a16="http://schemas.microsoft.com/office/drawing/2014/main" val="10002"/>
+                  </a:ext>
+                </a:extLst>
               </a:tr>
               <a:tr h="491490">
                 <a:tc>
@@ -5269,7 +5344,7 @@
                       </a:r>
                     </a:p>
                   </a:txBody>
-                  <a:tcPr marT="38100" marB="38100" marL="63500" marR="63500">
+                  <a:tcPr marL="63500" marR="63500" marT="38100" marB="38100">
                     <a:solidFill>
                       <a:srgbClr val="243824"/>
                     </a:solidFill>
@@ -5292,7 +5367,7 @@
                       </a:r>
                     </a:p>
                   </a:txBody>
-                  <a:tcPr marT="38100" marB="38100" marL="63500" marR="63500">
+                  <a:tcPr marL="63500" marR="63500" marT="38100" marB="38100">
                     <a:solidFill>
                       <a:srgbClr val="243824"/>
                     </a:solidFill>
@@ -5315,7 +5390,7 @@
                       </a:r>
                     </a:p>
                   </a:txBody>
-                  <a:tcPr marT="38100" marB="38100" marL="63500" marR="63500">
+                  <a:tcPr marL="63500" marR="63500" marT="38100" marB="38100">
                     <a:solidFill>
                       <a:srgbClr val="243824"/>
                     </a:solidFill>
@@ -5338,7 +5413,7 @@
                       </a:r>
                     </a:p>
                   </a:txBody>
-                  <a:tcPr marT="38100" marB="38100" marL="63500" marR="63500">
+                  <a:tcPr marL="63500" marR="63500" marT="38100" marB="38100">
                     <a:solidFill>
                       <a:srgbClr val="243824"/>
                     </a:solidFill>
@@ -5361,12 +5436,17 @@
                       </a:r>
                     </a:p>
                   </a:txBody>
-                  <a:tcPr marT="38100" marB="38100" marL="63500" marR="63500">
+                  <a:tcPr marL="63500" marR="63500" marT="38100" marB="38100">
                     <a:solidFill>
                       <a:srgbClr val="243824"/>
                     </a:solidFill>
                   </a:tcPr>
                 </a:tc>
+                <a:extLst>
+                  <a:ext uri="{0D108BD9-81ED-4DB2-BD59-A6C34878D82A}">
+                    <a16:rowId xmlns:a16="http://schemas.microsoft.com/office/drawing/2014/main" val="10003"/>
+                  </a:ext>
+                </a:extLst>
               </a:tr>
               <a:tr h="491490">
                 <a:tc>
@@ -5386,7 +5466,7 @@
                       </a:r>
                     </a:p>
                   </a:txBody>
-                  <a:tcPr marT="38100" marB="38100" marL="63500" marR="63500">
+                  <a:tcPr marL="63500" marR="63500" marT="38100" marB="38100">
                     <a:solidFill>
                       <a:srgbClr val="2A402A"/>
                     </a:solidFill>
@@ -5409,7 +5489,7 @@
                       </a:r>
                     </a:p>
                   </a:txBody>
-                  <a:tcPr marT="38100" marB="38100" marL="63500" marR="63500">
+                  <a:tcPr marL="63500" marR="63500" marT="38100" marB="38100">
                     <a:solidFill>
                       <a:srgbClr val="2A402A"/>
                     </a:solidFill>
@@ -5432,7 +5512,7 @@
                       </a:r>
                     </a:p>
                   </a:txBody>
-                  <a:tcPr marT="38100" marB="38100" marL="63500" marR="63500">
+                  <a:tcPr marL="63500" marR="63500" marT="38100" marB="38100">
                     <a:solidFill>
                       <a:srgbClr val="2A402A"/>
                     </a:solidFill>
@@ -5455,7 +5535,7 @@
                       </a:r>
                     </a:p>
                   </a:txBody>
-                  <a:tcPr marT="38100" marB="38100" marL="63500" marR="63500">
+                  <a:tcPr marL="63500" marR="63500" marT="38100" marB="38100">
                     <a:solidFill>
                       <a:srgbClr val="2A402A"/>
                     </a:solidFill>
@@ -5478,12 +5558,17 @@
                       </a:r>
                     </a:p>
                   </a:txBody>
-                  <a:tcPr marT="38100" marB="38100" marL="63500" marR="63500">
+                  <a:tcPr marL="63500" marR="63500" marT="38100" marB="38100">
                     <a:solidFill>
                       <a:srgbClr val="2A402A"/>
                     </a:solidFill>
                   </a:tcPr>
                 </a:tc>
+                <a:extLst>
+                  <a:ext uri="{0D108BD9-81ED-4DB2-BD59-A6C34878D82A}">
+                    <a16:rowId xmlns:a16="http://schemas.microsoft.com/office/drawing/2014/main" val="10004"/>
+                  </a:ext>
+                </a:extLst>
               </a:tr>
               <a:tr h="491490">
                 <a:tc>
@@ -5503,7 +5588,7 @@
                       </a:r>
                     </a:p>
                   </a:txBody>
-                  <a:tcPr marT="38100" marB="38100" marL="63500" marR="63500">
+                  <a:tcPr marL="63500" marR="63500" marT="38100" marB="38100">
                     <a:solidFill>
                       <a:srgbClr val="243824"/>
                     </a:solidFill>
@@ -5526,7 +5611,7 @@
                       </a:r>
                     </a:p>
                   </a:txBody>
-                  <a:tcPr marT="38100" marB="38100" marL="63500" marR="63500">
+                  <a:tcPr marL="63500" marR="63500" marT="38100" marB="38100">
                     <a:solidFill>
                       <a:srgbClr val="243824"/>
                     </a:solidFill>
@@ -5549,7 +5634,7 @@
                       </a:r>
                     </a:p>
                   </a:txBody>
-                  <a:tcPr marT="38100" marB="38100" marL="63500" marR="63500">
+                  <a:tcPr marL="63500" marR="63500" marT="38100" marB="38100">
                     <a:solidFill>
                       <a:srgbClr val="243824"/>
                     </a:solidFill>
@@ -5572,7 +5657,7 @@
                       </a:r>
                     </a:p>
                   </a:txBody>
-                  <a:tcPr marT="38100" marB="38100" marL="63500" marR="63500">
+                  <a:tcPr marL="63500" marR="63500" marT="38100" marB="38100">
                     <a:solidFill>
                       <a:srgbClr val="243824"/>
                     </a:solidFill>
@@ -5595,12 +5680,17 @@
                       </a:r>
                     </a:p>
                   </a:txBody>
-                  <a:tcPr marT="38100" marB="38100" marL="63500" marR="63500">
+                  <a:tcPr marL="63500" marR="63500" marT="38100" marB="38100">
                     <a:solidFill>
                       <a:srgbClr val="243824"/>
                     </a:solidFill>
                   </a:tcPr>
                 </a:tc>
+                <a:extLst>
+                  <a:ext uri="{0D108BD9-81ED-4DB2-BD59-A6C34878D82A}">
+                    <a16:rowId xmlns:a16="http://schemas.microsoft.com/office/drawing/2014/main" val="10005"/>
+                  </a:ext>
+                </a:extLst>
               </a:tr>
               <a:tr h="491490">
                 <a:tc>
@@ -5620,7 +5710,7 @@
                       </a:r>
                     </a:p>
                   </a:txBody>
-                  <a:tcPr marT="38100" marB="38100" marL="63500" marR="63500">
+                  <a:tcPr marL="63500" marR="63500" marT="38100" marB="38100">
                     <a:solidFill>
                       <a:srgbClr val="2A402A"/>
                     </a:solidFill>
@@ -5643,7 +5733,7 @@
                       </a:r>
                     </a:p>
                   </a:txBody>
-                  <a:tcPr marT="38100" marB="38100" marL="63500" marR="63500">
+                  <a:tcPr marL="63500" marR="63500" marT="38100" marB="38100">
                     <a:solidFill>
                       <a:srgbClr val="2A402A"/>
                     </a:solidFill>
@@ -5666,7 +5756,7 @@
                       </a:r>
                     </a:p>
                   </a:txBody>
-                  <a:tcPr marT="38100" marB="38100" marL="63500" marR="63500">
+                  <a:tcPr marL="63500" marR="63500" marT="38100" marB="38100">
                     <a:solidFill>
                       <a:srgbClr val="2A402A"/>
                     </a:solidFill>
@@ -5689,7 +5779,7 @@
                       </a:r>
                     </a:p>
                   </a:txBody>
-                  <a:tcPr marT="38100" marB="38100" marL="63500" marR="63500">
+                  <a:tcPr marL="63500" marR="63500" marT="38100" marB="38100">
                     <a:solidFill>
                       <a:srgbClr val="2A402A"/>
                     </a:solidFill>
@@ -5712,12 +5802,17 @@
                       </a:r>
                     </a:p>
                   </a:txBody>
-                  <a:tcPr marT="38100" marB="38100" marL="63500" marR="63500">
+                  <a:tcPr marL="63500" marR="63500" marT="38100" marB="38100">
                     <a:solidFill>
                       <a:srgbClr val="2A402A"/>
                     </a:solidFill>
                   </a:tcPr>
                 </a:tc>
+                <a:extLst>
+                  <a:ext uri="{0D108BD9-81ED-4DB2-BD59-A6C34878D82A}">
+                    <a16:rowId xmlns:a16="http://schemas.microsoft.com/office/drawing/2014/main" val="10006"/>
+                  </a:ext>
+                </a:extLst>
               </a:tr>
               <a:tr h="491490">
                 <a:tc>
@@ -5737,7 +5832,7 @@
                       </a:r>
                     </a:p>
                   </a:txBody>
-                  <a:tcPr marT="38100" marB="38100" marL="63500" marR="63500">
+                  <a:tcPr marL="63500" marR="63500" marT="38100" marB="38100">
                     <a:solidFill>
                       <a:srgbClr val="243824"/>
                     </a:solidFill>
@@ -5760,7 +5855,7 @@
                       </a:r>
                     </a:p>
                   </a:txBody>
-                  <a:tcPr marT="38100" marB="38100" marL="63500" marR="63500">
+                  <a:tcPr marL="63500" marR="63500" marT="38100" marB="38100">
                     <a:solidFill>
                       <a:srgbClr val="243824"/>
                     </a:solidFill>
@@ -5783,7 +5878,7 @@
                       </a:r>
                     </a:p>
                   </a:txBody>
-                  <a:tcPr marT="38100" marB="38100" marL="63500" marR="63500">
+                  <a:tcPr marL="63500" marR="63500" marT="38100" marB="38100">
                     <a:solidFill>
                       <a:srgbClr val="243824"/>
                     </a:solidFill>
@@ -5806,7 +5901,7 @@
                       </a:r>
                     </a:p>
                   </a:txBody>
-                  <a:tcPr marT="38100" marB="38100" marL="63500" marR="63500">
+                  <a:tcPr marL="63500" marR="63500" marT="38100" marB="38100">
                     <a:solidFill>
                       <a:srgbClr val="243824"/>
                     </a:solidFill>
@@ -5829,12 +5924,17 @@
                       </a:r>
                     </a:p>
                   </a:txBody>
-                  <a:tcPr marT="38100" marB="38100" marL="63500" marR="63500">
+                  <a:tcPr marL="63500" marR="63500" marT="38100" marB="38100">
                     <a:solidFill>
                       <a:srgbClr val="243824"/>
                     </a:solidFill>
                   </a:tcPr>
                 </a:tc>
+                <a:extLst>
+                  <a:ext uri="{0D108BD9-81ED-4DB2-BD59-A6C34878D82A}">
+                    <a16:rowId xmlns:a16="http://schemas.microsoft.com/office/drawing/2014/main" val="10007"/>
+                  </a:ext>
+                </a:extLst>
               </a:tr>
             </a:tbl>
           </a:graphicData>
@@ -5880,6 +5980,7 @@
           <a:lstStyle/>
           <a:p>
             <a:pPr algn="ctr"/>
+            <a:endParaRPr/>
           </a:p>
         </p:txBody>
       </p:sp>
@@ -5958,6 +6059,7 @@
           <a:lstStyle/>
           <a:p>
             <a:pPr algn="ctr"/>
+            <a:endParaRPr/>
           </a:p>
         </p:txBody>
       </p:sp>
@@ -6071,6 +6173,7 @@
           <a:lstStyle/>
           <a:p>
             <a:pPr algn="ctr"/>
+            <a:endParaRPr/>
           </a:p>
         </p:txBody>
       </p:sp>
@@ -6184,6 +6287,7 @@
           <a:lstStyle/>
           <a:p>
             <a:pPr algn="ctr"/>
+            <a:endParaRPr/>
           </a:p>
         </p:txBody>
       </p:sp>
@@ -6297,6 +6401,7 @@
           <a:lstStyle/>
           <a:p>
             <a:pPr algn="ctr"/>
+            <a:endParaRPr/>
           </a:p>
         </p:txBody>
       </p:sp>
@@ -6410,6 +6515,7 @@
           <a:lstStyle/>
           <a:p>
             <a:pPr algn="ctr"/>
+            <a:endParaRPr/>
           </a:p>
         </p:txBody>
       </p:sp>
@@ -6492,7 +6598,7 @@
 </file>
 
 <file path=ppt/slides/slide12.xml><?xml version="1.0" encoding="utf-8"?>
-<p:sld xmlns:a="http://schemas.openxmlformats.org/drawingml/2006/main" xmlns:p="http://schemas.openxmlformats.org/presentationml/2006/main" xmlns:r="http://schemas.openxmlformats.org/officeDocument/2006/relationships">
+<p:sld xmlns:a="http://schemas.openxmlformats.org/drawingml/2006/main" xmlns:r="http://schemas.openxmlformats.org/officeDocument/2006/relationships" xmlns:p="http://schemas.openxmlformats.org/presentationml/2006/main">
   <p:cSld>
     <p:bg>
       <p:bgPr>
@@ -6508,7 +6614,14 @@
         <p:cNvGrpSpPr/>
         <p:nvPr/>
       </p:nvGrpSpPr>
-      <p:grpSpPr/>
+      <p:grpSpPr>
+        <a:xfrm>
+          <a:off x="0" y="0"/>
+          <a:ext cx="0" cy="0"/>
+          <a:chOff x="0" y="0"/>
+          <a:chExt cx="0" cy="0"/>
+        </a:xfrm>
+      </p:grpSpPr>
       <p:sp>
         <p:nvSpPr>
           <p:cNvPr id="2" name="Rectangle 1"/>
@@ -6549,6 +6662,7 @@
           <a:lstStyle/>
           <a:p>
             <a:pPr algn="ctr"/>
+            <a:endParaRPr/>
           </a:p>
         </p:txBody>
       </p:sp>
@@ -6662,6 +6776,7 @@
           <a:lstStyle/>
           <a:p>
             <a:pPr algn="ctr"/>
+            <a:endParaRPr/>
           </a:p>
         </p:txBody>
       </p:sp>
@@ -6875,6 +6990,7 @@
           <a:lstStyle/>
           <a:p>
             <a:pPr algn="ctr"/>
+            <a:endParaRPr/>
           </a:p>
         </p:txBody>
       </p:sp>
@@ -7057,7 +7173,7 @@
 </file>
 
 <file path=ppt/slides/slide13.xml><?xml version="1.0" encoding="utf-8"?>
-<p:sld xmlns:a="http://schemas.openxmlformats.org/drawingml/2006/main" xmlns:p="http://schemas.openxmlformats.org/presentationml/2006/main" xmlns:r="http://schemas.openxmlformats.org/officeDocument/2006/relationships">
+<p:sld xmlns:a="http://schemas.openxmlformats.org/drawingml/2006/main" xmlns:r="http://schemas.openxmlformats.org/officeDocument/2006/relationships" xmlns:p="http://schemas.openxmlformats.org/presentationml/2006/main">
   <p:cSld>
     <p:bg>
       <p:bgPr>
@@ -7073,7 +7189,14 @@
         <p:cNvGrpSpPr/>
         <p:nvPr/>
       </p:nvGrpSpPr>
-      <p:grpSpPr/>
+      <p:grpSpPr>
+        <a:xfrm>
+          <a:off x="0" y="0"/>
+          <a:ext cx="0" cy="0"/>
+          <a:chOff x="0" y="0"/>
+          <a:chExt cx="0" cy="0"/>
+        </a:xfrm>
+      </p:grpSpPr>
       <p:sp>
         <p:nvSpPr>
           <p:cNvPr id="2" name="Rectangle 1"/>
@@ -7114,6 +7237,7 @@
           <a:lstStyle/>
           <a:p>
             <a:pPr algn="ctr"/>
+            <a:endParaRPr/>
           </a:p>
         </p:txBody>
       </p:sp>
@@ -7206,9 +7330,27 @@
                 <a:tableStyleId>{5C22544A-7EE6-4342-B048-85BDC9FD1C3A}</a:tableStyleId>
               </a:tblPr>
               <a:tblGrid>
-                <a:gridCol w="2743200"/>
-                <a:gridCol w="6675120"/>
-                <a:gridCol w="2103120"/>
+                <a:gridCol w="2743200">
+                  <a:extLst>
+                    <a:ext uri="{9D8B030D-6E8A-4147-A177-3AD203B41FA5}">
+                      <a16:colId xmlns:a16="http://schemas.microsoft.com/office/drawing/2014/main" val="20000"/>
+                    </a:ext>
+                  </a:extLst>
+                </a:gridCol>
+                <a:gridCol w="6675120">
+                  <a:extLst>
+                    <a:ext uri="{9D8B030D-6E8A-4147-A177-3AD203B41FA5}">
+                      <a16:colId xmlns:a16="http://schemas.microsoft.com/office/drawing/2014/main" val="20001"/>
+                    </a:ext>
+                  </a:extLst>
+                </a:gridCol>
+                <a:gridCol w="2103120">
+                  <a:extLst>
+                    <a:ext uri="{9D8B030D-6E8A-4147-A177-3AD203B41FA5}">
+                      <a16:colId xmlns:a16="http://schemas.microsoft.com/office/drawing/2014/main" val="20002"/>
+                    </a:ext>
+                  </a:extLst>
+                </a:gridCol>
               </a:tblGrid>
               <a:tr h="668655">
                 <a:tc>
@@ -7218,7 +7360,7 @@
                     <a:p>
                       <a:pPr algn="ctr"/>
                       <a:r>
-                        <a:rPr b="1" sz="1400">
+                        <a:rPr sz="1400" b="1">
                           <a:solidFill>
                             <a:srgbClr val="C8A020"/>
                           </a:solidFill>
@@ -7228,7 +7370,7 @@
                       </a:r>
                     </a:p>
                   </a:txBody>
-                  <a:tcPr marT="38100" marB="38100" marL="63500" marR="63500">
+                  <a:tcPr marL="63500" marR="63500" marT="38100" marB="38100">
                     <a:solidFill>
                       <a:srgbClr val="3A5A3A"/>
                     </a:solidFill>
@@ -7241,7 +7383,7 @@
                     <a:p>
                       <a:pPr algn="ctr"/>
                       <a:r>
-                        <a:rPr b="1" sz="1400">
+                        <a:rPr sz="1400" b="1">
                           <a:solidFill>
                             <a:srgbClr val="C8A020"/>
                           </a:solidFill>
@@ -7251,7 +7393,7 @@
                       </a:r>
                     </a:p>
                   </a:txBody>
-                  <a:tcPr marT="38100" marB="38100" marL="63500" marR="63500">
+                  <a:tcPr marL="63500" marR="63500" marT="38100" marB="38100">
                     <a:solidFill>
                       <a:srgbClr val="3A5A3A"/>
                     </a:solidFill>
@@ -7264,7 +7406,7 @@
                     <a:p>
                       <a:pPr algn="ctr"/>
                       <a:r>
-                        <a:rPr b="1" sz="1400">
+                        <a:rPr sz="1400" b="1">
                           <a:solidFill>
                             <a:srgbClr val="C8A020"/>
                           </a:solidFill>
@@ -7274,12 +7416,17 @@
                       </a:r>
                     </a:p>
                   </a:txBody>
-                  <a:tcPr marT="38100" marB="38100" marL="63500" marR="63500">
+                  <a:tcPr marL="63500" marR="63500" marT="38100" marB="38100">
                     <a:solidFill>
                       <a:srgbClr val="3A5A3A"/>
                     </a:solidFill>
                   </a:tcPr>
                 </a:tc>
+                <a:extLst>
+                  <a:ext uri="{0D108BD9-81ED-4DB2-BD59-A6C34878D82A}">
+                    <a16:rowId xmlns:a16="http://schemas.microsoft.com/office/drawing/2014/main" val="10000"/>
+                  </a:ext>
+                </a:extLst>
               </a:tr>
               <a:tr h="668655">
                 <a:tc>
@@ -7299,7 +7446,7 @@
                       </a:r>
                     </a:p>
                   </a:txBody>
-                  <a:tcPr marT="38100" marB="38100" marL="63500" marR="63500">
+                  <a:tcPr marL="63500" marR="63500" marT="38100" marB="38100">
                     <a:solidFill>
                       <a:srgbClr val="243824"/>
                     </a:solidFill>
@@ -7322,7 +7469,7 @@
                       </a:r>
                     </a:p>
                   </a:txBody>
-                  <a:tcPr marT="38100" marB="38100" marL="63500" marR="63500">
+                  <a:tcPr marL="63500" marR="63500" marT="38100" marB="38100">
                     <a:solidFill>
                       <a:srgbClr val="243824"/>
                     </a:solidFill>
@@ -7345,12 +7492,17 @@
                       </a:r>
                     </a:p>
                   </a:txBody>
-                  <a:tcPr marT="38100" marB="38100" marL="63500" marR="63500">
+                  <a:tcPr marL="63500" marR="63500" marT="38100" marB="38100">
                     <a:solidFill>
                       <a:srgbClr val="28B463"/>
                     </a:solidFill>
                   </a:tcPr>
                 </a:tc>
+                <a:extLst>
+                  <a:ext uri="{0D108BD9-81ED-4DB2-BD59-A6C34878D82A}">
+                    <a16:rowId xmlns:a16="http://schemas.microsoft.com/office/drawing/2014/main" val="10001"/>
+                  </a:ext>
+                </a:extLst>
               </a:tr>
               <a:tr h="668655">
                 <a:tc>
@@ -7370,7 +7522,7 @@
                       </a:r>
                     </a:p>
                   </a:txBody>
-                  <a:tcPr marT="38100" marB="38100" marL="63500" marR="63500">
+                  <a:tcPr marL="63500" marR="63500" marT="38100" marB="38100">
                     <a:solidFill>
                       <a:srgbClr val="2A402A"/>
                     </a:solidFill>
@@ -7393,7 +7545,7 @@
                       </a:r>
                     </a:p>
                   </a:txBody>
-                  <a:tcPr marT="38100" marB="38100" marL="63500" marR="63500">
+                  <a:tcPr marL="63500" marR="63500" marT="38100" marB="38100">
                     <a:solidFill>
                       <a:srgbClr val="2A402A"/>
                     </a:solidFill>
@@ -7416,12 +7568,17 @@
                       </a:r>
                     </a:p>
                   </a:txBody>
-                  <a:tcPr marT="38100" marB="38100" marL="63500" marR="63500">
+                  <a:tcPr marL="63500" marR="63500" marT="38100" marB="38100">
                     <a:solidFill>
                       <a:srgbClr val="28B463"/>
                     </a:solidFill>
                   </a:tcPr>
                 </a:tc>
+                <a:extLst>
+                  <a:ext uri="{0D108BD9-81ED-4DB2-BD59-A6C34878D82A}">
+                    <a16:rowId xmlns:a16="http://schemas.microsoft.com/office/drawing/2014/main" val="10002"/>
+                  </a:ext>
+                </a:extLst>
               </a:tr>
               <a:tr h="668655">
                 <a:tc>
@@ -7441,7 +7598,7 @@
                       </a:r>
                     </a:p>
                   </a:txBody>
-                  <a:tcPr marT="38100" marB="38100" marL="63500" marR="63500">
+                  <a:tcPr marL="63500" marR="63500" marT="38100" marB="38100">
                     <a:solidFill>
                       <a:srgbClr val="243824"/>
                     </a:solidFill>
@@ -7464,7 +7621,7 @@
                       </a:r>
                     </a:p>
                   </a:txBody>
-                  <a:tcPr marT="38100" marB="38100" marL="63500" marR="63500">
+                  <a:tcPr marL="63500" marR="63500" marT="38100" marB="38100">
                     <a:solidFill>
                       <a:srgbClr val="243824"/>
                     </a:solidFill>
@@ -7487,12 +7644,17 @@
                       </a:r>
                     </a:p>
                   </a:txBody>
-                  <a:tcPr marT="38100" marB="38100" marL="63500" marR="63500">
+                  <a:tcPr marL="63500" marR="63500" marT="38100" marB="38100">
                     <a:solidFill>
                       <a:srgbClr val="28B463"/>
                     </a:solidFill>
                   </a:tcPr>
                 </a:tc>
+                <a:extLst>
+                  <a:ext uri="{0D108BD9-81ED-4DB2-BD59-A6C34878D82A}">
+                    <a16:rowId xmlns:a16="http://schemas.microsoft.com/office/drawing/2014/main" val="10003"/>
+                  </a:ext>
+                </a:extLst>
               </a:tr>
               <a:tr h="668655">
                 <a:tc>
@@ -7512,7 +7674,7 @@
                       </a:r>
                     </a:p>
                   </a:txBody>
-                  <a:tcPr marT="38100" marB="38100" marL="63500" marR="63500">
+                  <a:tcPr marL="63500" marR="63500" marT="38100" marB="38100">
                     <a:solidFill>
                       <a:srgbClr val="2A402A"/>
                     </a:solidFill>
@@ -7535,7 +7697,7 @@
                       </a:r>
                     </a:p>
                   </a:txBody>
-                  <a:tcPr marT="38100" marB="38100" marL="63500" marR="63500">
+                  <a:tcPr marL="63500" marR="63500" marT="38100" marB="38100">
                     <a:solidFill>
                       <a:srgbClr val="2A402A"/>
                     </a:solidFill>
@@ -7558,12 +7720,17 @@
                       </a:r>
                     </a:p>
                   </a:txBody>
-                  <a:tcPr marT="38100" marB="38100" marL="63500" marR="63500">
+                  <a:tcPr marL="63500" marR="63500" marT="38100" marB="38100">
                     <a:solidFill>
                       <a:srgbClr val="28B463"/>
                     </a:solidFill>
                   </a:tcPr>
                 </a:tc>
+                <a:extLst>
+                  <a:ext uri="{0D108BD9-81ED-4DB2-BD59-A6C34878D82A}">
+                    <a16:rowId xmlns:a16="http://schemas.microsoft.com/office/drawing/2014/main" val="10004"/>
+                  </a:ext>
+                </a:extLst>
               </a:tr>
               <a:tr h="668655">
                 <a:tc>
@@ -7583,7 +7750,7 @@
                       </a:r>
                     </a:p>
                   </a:txBody>
-                  <a:tcPr marT="38100" marB="38100" marL="63500" marR="63500">
+                  <a:tcPr marL="63500" marR="63500" marT="38100" marB="38100">
                     <a:solidFill>
                       <a:srgbClr val="243824"/>
                     </a:solidFill>
@@ -7606,7 +7773,7 @@
                       </a:r>
                     </a:p>
                   </a:txBody>
-                  <a:tcPr marT="38100" marB="38100" marL="63500" marR="63500">
+                  <a:tcPr marL="63500" marR="63500" marT="38100" marB="38100">
                     <a:solidFill>
                       <a:srgbClr val="243824"/>
                     </a:solidFill>
@@ -7629,12 +7796,17 @@
                       </a:r>
                     </a:p>
                   </a:txBody>
-                  <a:tcPr marT="38100" marB="38100" marL="63500" marR="63500">
+                  <a:tcPr marL="63500" marR="63500" marT="38100" marB="38100">
                     <a:solidFill>
                       <a:srgbClr val="28B463"/>
                     </a:solidFill>
                   </a:tcPr>
                 </a:tc>
+                <a:extLst>
+                  <a:ext uri="{0D108BD9-81ED-4DB2-BD59-A6C34878D82A}">
+                    <a16:rowId xmlns:a16="http://schemas.microsoft.com/office/drawing/2014/main" val="10005"/>
+                  </a:ext>
+                </a:extLst>
               </a:tr>
               <a:tr h="668655">
                 <a:tc>
@@ -7654,7 +7826,7 @@
                       </a:r>
                     </a:p>
                   </a:txBody>
-                  <a:tcPr marT="38100" marB="38100" marL="63500" marR="63500">
+                  <a:tcPr marL="63500" marR="63500" marT="38100" marB="38100">
                     <a:solidFill>
                       <a:srgbClr val="2A402A"/>
                     </a:solidFill>
@@ -7677,7 +7849,7 @@
                       </a:r>
                     </a:p>
                   </a:txBody>
-                  <a:tcPr marT="38100" marB="38100" marL="63500" marR="63500">
+                  <a:tcPr marL="63500" marR="63500" marT="38100" marB="38100">
                     <a:solidFill>
                       <a:srgbClr val="2A402A"/>
                     </a:solidFill>
@@ -7700,12 +7872,17 @@
                       </a:r>
                     </a:p>
                   </a:txBody>
-                  <a:tcPr marT="38100" marB="38100" marL="63500" marR="63500">
+                  <a:tcPr marL="63500" marR="63500" marT="38100" marB="38100">
                     <a:solidFill>
                       <a:srgbClr val="28B463"/>
                     </a:solidFill>
                   </a:tcPr>
                 </a:tc>
+                <a:extLst>
+                  <a:ext uri="{0D108BD9-81ED-4DB2-BD59-A6C34878D82A}">
+                    <a16:rowId xmlns:a16="http://schemas.microsoft.com/office/drawing/2014/main" val="10006"/>
+                  </a:ext>
+                </a:extLst>
               </a:tr>
               <a:tr h="668655">
                 <a:tc>
@@ -7725,7 +7902,7 @@
                       </a:r>
                     </a:p>
                   </a:txBody>
-                  <a:tcPr marT="38100" marB="38100" marL="63500" marR="63500">
+                  <a:tcPr marL="63500" marR="63500" marT="38100" marB="38100">
                     <a:solidFill>
                       <a:srgbClr val="243824"/>
                     </a:solidFill>
@@ -7748,7 +7925,7 @@
                       </a:r>
                     </a:p>
                   </a:txBody>
-                  <a:tcPr marT="38100" marB="38100" marL="63500" marR="63500">
+                  <a:tcPr marL="63500" marR="63500" marT="38100" marB="38100">
                     <a:solidFill>
                       <a:srgbClr val="243824"/>
                     </a:solidFill>
@@ -7771,12 +7948,17 @@
                       </a:r>
                     </a:p>
                   </a:txBody>
-                  <a:tcPr marT="38100" marB="38100" marL="63500" marR="63500">
+                  <a:tcPr marL="63500" marR="63500" marT="38100" marB="38100">
                     <a:solidFill>
                       <a:srgbClr val="C0392B"/>
                     </a:solidFill>
                   </a:tcPr>
                 </a:tc>
+                <a:extLst>
+                  <a:ext uri="{0D108BD9-81ED-4DB2-BD59-A6C34878D82A}">
+                    <a16:rowId xmlns:a16="http://schemas.microsoft.com/office/drawing/2014/main" val="10007"/>
+                  </a:ext>
+                </a:extLst>
               </a:tr>
             </a:tbl>
           </a:graphicData>
@@ -7791,7 +7973,7 @@
 </file>
 
 <file path=ppt/slides/slide14.xml><?xml version="1.0" encoding="utf-8"?>
-<p:sld xmlns:a="http://schemas.openxmlformats.org/drawingml/2006/main" xmlns:p="http://schemas.openxmlformats.org/presentationml/2006/main" xmlns:r="http://schemas.openxmlformats.org/officeDocument/2006/relationships">
+<p:sld xmlns:a="http://schemas.openxmlformats.org/drawingml/2006/main" xmlns:r="http://schemas.openxmlformats.org/officeDocument/2006/relationships" xmlns:p="http://schemas.openxmlformats.org/presentationml/2006/main">
   <p:cSld>
     <p:bg>
       <p:bgPr>
@@ -7807,7 +7989,14 @@
         <p:cNvGrpSpPr/>
         <p:nvPr/>
       </p:nvGrpSpPr>
-      <p:grpSpPr/>
+      <p:grpSpPr>
+        <a:xfrm>
+          <a:off x="0" y="0"/>
+          <a:ext cx="0" cy="0"/>
+          <a:chOff x="0" y="0"/>
+          <a:chExt cx="0" cy="0"/>
+        </a:xfrm>
+      </p:grpSpPr>
       <p:sp>
         <p:nvSpPr>
           <p:cNvPr id="2" name="Rectangle 1"/>
@@ -7848,6 +8037,7 @@
           <a:lstStyle/>
           <a:p>
             <a:pPr algn="ctr"/>
+            <a:endParaRPr/>
           </a:p>
         </p:txBody>
       </p:sp>
@@ -7961,6 +8151,7 @@
           <a:lstStyle/>
           <a:p>
             <a:pPr algn="ctr"/>
+            <a:endParaRPr/>
           </a:p>
         </p:txBody>
       </p:sp>
@@ -8212,6 +8403,7 @@
           <a:lstStyle/>
           <a:p>
             <a:pPr algn="ctr"/>
+            <a:endParaRPr/>
           </a:p>
         </p:txBody>
       </p:sp>
@@ -8432,7 +8624,7 @@
 </file>
 
 <file path=ppt/slides/slide15.xml><?xml version="1.0" encoding="utf-8"?>
-<p:sld xmlns:a="http://schemas.openxmlformats.org/drawingml/2006/main" xmlns:p="http://schemas.openxmlformats.org/presentationml/2006/main" xmlns:r="http://schemas.openxmlformats.org/officeDocument/2006/relationships">
+<p:sld xmlns:a="http://schemas.openxmlformats.org/drawingml/2006/main" xmlns:r="http://schemas.openxmlformats.org/officeDocument/2006/relationships" xmlns:p="http://schemas.openxmlformats.org/presentationml/2006/main">
   <p:cSld>
     <p:bg>
       <p:bgPr>
@@ -8448,7 +8640,14 @@
         <p:cNvGrpSpPr/>
         <p:nvPr/>
       </p:nvGrpSpPr>
-      <p:grpSpPr/>
+      <p:grpSpPr>
+        <a:xfrm>
+          <a:off x="0" y="0"/>
+          <a:ext cx="0" cy="0"/>
+          <a:chOff x="0" y="0"/>
+          <a:chExt cx="0" cy="0"/>
+        </a:xfrm>
+      </p:grpSpPr>
       <p:sp>
         <p:nvSpPr>
           <p:cNvPr id="2" name="Rectangle 1"/>
@@ -8489,6 +8688,7 @@
           <a:lstStyle/>
           <a:p>
             <a:pPr algn="ctr"/>
+            <a:endParaRPr/>
           </a:p>
         </p:txBody>
       </p:sp>
@@ -8602,6 +8802,7 @@
           <a:lstStyle/>
           <a:p>
             <a:pPr algn="ctr"/>
+            <a:endParaRPr/>
           </a:p>
         </p:txBody>
       </p:sp>
@@ -8645,6 +8846,7 @@
           <a:lstStyle/>
           <a:p>
             <a:pPr algn="ctr"/>
+            <a:endParaRPr/>
           </a:p>
         </p:txBody>
       </p:sp>
@@ -8810,6 +9012,7 @@
           <a:lstStyle/>
           <a:p>
             <a:pPr algn="ctr"/>
+            <a:endParaRPr/>
           </a:p>
         </p:txBody>
       </p:sp>
@@ -8853,6 +9056,7 @@
           <a:lstStyle/>
           <a:p>
             <a:pPr algn="ctr"/>
+            <a:endParaRPr/>
           </a:p>
         </p:txBody>
       </p:sp>
@@ -9018,6 +9222,7 @@
           <a:lstStyle/>
           <a:p>
             <a:pPr algn="ctr"/>
+            <a:endParaRPr/>
           </a:p>
         </p:txBody>
       </p:sp>
@@ -9061,6 +9266,7 @@
           <a:lstStyle/>
           <a:p>
             <a:pPr algn="ctr"/>
+            <a:endParaRPr/>
           </a:p>
         </p:txBody>
       </p:sp>
@@ -9226,6 +9432,7 @@
           <a:lstStyle/>
           <a:p>
             <a:pPr algn="ctr"/>
+            <a:endParaRPr/>
           </a:p>
         </p:txBody>
       </p:sp>
@@ -9269,6 +9476,7 @@
           <a:lstStyle/>
           <a:p>
             <a:pPr algn="ctr"/>
+            <a:endParaRPr/>
           </a:p>
         </p:txBody>
       </p:sp>
@@ -9403,7 +9611,7 @@
 </file>
 
 <file path=ppt/slides/slide16.xml><?xml version="1.0" encoding="utf-8"?>
-<p:sld xmlns:a="http://schemas.openxmlformats.org/drawingml/2006/main" xmlns:p="http://schemas.openxmlformats.org/presentationml/2006/main" xmlns:r="http://schemas.openxmlformats.org/officeDocument/2006/relationships">
+<p:sld xmlns:a="http://schemas.openxmlformats.org/drawingml/2006/main" xmlns:r="http://schemas.openxmlformats.org/officeDocument/2006/relationships" xmlns:p="http://schemas.openxmlformats.org/presentationml/2006/main">
   <p:cSld>
     <p:bg>
       <p:bgPr>
@@ -9419,7 +9627,14 @@
         <p:cNvGrpSpPr/>
         <p:nvPr/>
       </p:nvGrpSpPr>
-      <p:grpSpPr/>
+      <p:grpSpPr>
+        <a:xfrm>
+          <a:off x="0" y="0"/>
+          <a:ext cx="0" cy="0"/>
+          <a:chOff x="0" y="0"/>
+          <a:chExt cx="0" cy="0"/>
+        </a:xfrm>
+      </p:grpSpPr>
       <p:sp>
         <p:nvSpPr>
           <p:cNvPr id="2" name="Rectangle 1"/>
@@ -9460,6 +9675,7 @@
           <a:lstStyle/>
           <a:p>
             <a:pPr algn="ctr"/>
+            <a:endParaRPr/>
           </a:p>
         </p:txBody>
       </p:sp>
@@ -9573,6 +9789,7 @@
           <a:lstStyle/>
           <a:p>
             <a:pPr algn="ctr"/>
+            <a:endParaRPr/>
           </a:p>
         </p:txBody>
       </p:sp>
@@ -9651,6 +9868,7 @@
           <a:lstStyle/>
           <a:p>
             <a:pPr algn="ctr"/>
+            <a:endParaRPr/>
           </a:p>
         </p:txBody>
       </p:sp>
@@ -9764,6 +9982,7 @@
           <a:lstStyle/>
           <a:p>
             <a:pPr algn="ctr"/>
+            <a:endParaRPr/>
           </a:p>
         </p:txBody>
       </p:sp>
@@ -9842,6 +10061,7 @@
           <a:lstStyle/>
           <a:p>
             <a:pPr algn="ctr"/>
+            <a:endParaRPr/>
           </a:p>
         </p:txBody>
       </p:sp>
@@ -9955,6 +10175,7 @@
           <a:lstStyle/>
           <a:p>
             <a:pPr algn="ctr"/>
+            <a:endParaRPr/>
           </a:p>
         </p:txBody>
       </p:sp>
@@ -10033,6 +10254,7 @@
           <a:lstStyle/>
           <a:p>
             <a:pPr algn="ctr"/>
+            <a:endParaRPr/>
           </a:p>
         </p:txBody>
       </p:sp>
@@ -10146,6 +10368,7 @@
           <a:lstStyle/>
           <a:p>
             <a:pPr algn="ctr"/>
+            <a:endParaRPr/>
           </a:p>
         </p:txBody>
       </p:sp>
@@ -10224,6 +10447,7 @@
           <a:lstStyle/>
           <a:p>
             <a:pPr algn="ctr"/>
+            <a:endParaRPr/>
           </a:p>
         </p:txBody>
       </p:sp>
@@ -10337,6 +10561,7 @@
           <a:lstStyle/>
           <a:p>
             <a:pPr algn="ctr"/>
+            <a:endParaRPr/>
           </a:p>
         </p:txBody>
       </p:sp>
@@ -10415,6 +10640,7 @@
           <a:lstStyle/>
           <a:p>
             <a:pPr algn="ctr"/>
+            <a:endParaRPr/>
           </a:p>
         </p:txBody>
       </p:sp>
@@ -10528,6 +10754,7 @@
           <a:lstStyle/>
           <a:p>
             <a:pPr algn="ctr"/>
+            <a:endParaRPr/>
           </a:p>
         </p:txBody>
       </p:sp>
@@ -10606,6 +10833,7 @@
           <a:lstStyle/>
           <a:p>
             <a:pPr algn="ctr"/>
+            <a:endParaRPr/>
           </a:p>
         </p:txBody>
       </p:sp>
@@ -10719,6 +10947,7 @@
           <a:lstStyle/>
           <a:p>
             <a:pPr algn="ctr"/>
+            <a:endParaRPr/>
           </a:p>
         </p:txBody>
       </p:sp>
@@ -10797,6 +11026,7 @@
           <a:lstStyle/>
           <a:p>
             <a:pPr algn="ctr"/>
+            <a:endParaRPr/>
           </a:p>
         </p:txBody>
       </p:sp>
@@ -10879,7 +11109,7 @@
 </file>
 
 <file path=ppt/slides/slide17.xml><?xml version="1.0" encoding="utf-8"?>
-<p:sld xmlns:a="http://schemas.openxmlformats.org/drawingml/2006/main" xmlns:p="http://schemas.openxmlformats.org/presentationml/2006/main" xmlns:r="http://schemas.openxmlformats.org/officeDocument/2006/relationships">
+<p:sld xmlns:a="http://schemas.openxmlformats.org/drawingml/2006/main" xmlns:r="http://schemas.openxmlformats.org/officeDocument/2006/relationships" xmlns:p="http://schemas.openxmlformats.org/presentationml/2006/main">
   <p:cSld>
     <p:bg>
       <p:bgPr>
@@ -10895,7 +11125,14 @@
         <p:cNvGrpSpPr/>
         <p:nvPr/>
       </p:nvGrpSpPr>
-      <p:grpSpPr/>
+      <p:grpSpPr>
+        <a:xfrm>
+          <a:off x="0" y="0"/>
+          <a:ext cx="0" cy="0"/>
+          <a:chOff x="0" y="0"/>
+          <a:chExt cx="0" cy="0"/>
+        </a:xfrm>
+      </p:grpSpPr>
       <p:sp>
         <p:nvSpPr>
           <p:cNvPr id="2" name="Rectangle 1"/>
@@ -10904,7 +11141,7 @@
         </p:nvSpPr>
         <p:spPr>
           <a:xfrm>
-            <a:off x="457200" y="1097280"/>
+            <a:off x="457136" y="429768"/>
             <a:ext cx="11274552" cy="4754880"/>
           </a:xfrm>
           <a:prstGeom prst="rect">
@@ -10936,6 +11173,7 @@
           <a:lstStyle/>
           <a:p>
             <a:pPr algn="ctr"/>
+            <a:endParaRPr/>
           </a:p>
         </p:txBody>
       </p:sp>
@@ -11154,6 +11392,7 @@
           <a:lstStyle/>
           <a:p>
             <a:pPr algn="ctr"/>
+            <a:endParaRPr/>
           </a:p>
         </p:txBody>
       </p:sp>
@@ -11267,6 +11506,7 @@
           <a:lstStyle/>
           <a:p>
             <a:pPr algn="ctr"/>
+            <a:endParaRPr/>
           </a:p>
         </p:txBody>
       </p:sp>
@@ -11380,6 +11620,7 @@
           <a:lstStyle/>
           <a:p>
             <a:pPr algn="ctr"/>
+            <a:endParaRPr/>
           </a:p>
         </p:txBody>
       </p:sp>
@@ -11493,6 +11734,7 @@
           <a:lstStyle/>
           <a:p>
             <a:pPr algn="ctr"/>
+            <a:endParaRPr/>
           </a:p>
         </p:txBody>
       </p:sp>
@@ -11606,6 +11848,7 @@
           <a:lstStyle/>
           <a:p>
             <a:pPr algn="ctr"/>
+            <a:endParaRPr/>
           </a:p>
         </p:txBody>
       </p:sp>
@@ -11719,6 +11962,7 @@
           <a:lstStyle/>
           <a:p>
             <a:pPr algn="ctr"/>
+            <a:endParaRPr/>
           </a:p>
         </p:txBody>
       </p:sp>
@@ -11801,7 +12045,7 @@
 </file>
 
 <file path=ppt/slides/slide2.xml><?xml version="1.0" encoding="utf-8"?>
-<p:sld xmlns:a="http://schemas.openxmlformats.org/drawingml/2006/main" xmlns:p="http://schemas.openxmlformats.org/presentationml/2006/main" xmlns:r="http://schemas.openxmlformats.org/officeDocument/2006/relationships">
+<p:sld xmlns:a="http://schemas.openxmlformats.org/drawingml/2006/main" xmlns:r="http://schemas.openxmlformats.org/officeDocument/2006/relationships" xmlns:p="http://schemas.openxmlformats.org/presentationml/2006/main">
   <p:cSld>
     <p:bg>
       <p:bgPr>
@@ -11817,7 +12061,14 @@
         <p:cNvGrpSpPr/>
         <p:nvPr/>
       </p:nvGrpSpPr>
-      <p:grpSpPr/>
+      <p:grpSpPr>
+        <a:xfrm>
+          <a:off x="0" y="0"/>
+          <a:ext cx="0" cy="0"/>
+          <a:chOff x="0" y="0"/>
+          <a:chExt cx="0" cy="0"/>
+        </a:xfrm>
+      </p:grpSpPr>
       <p:sp>
         <p:nvSpPr>
           <p:cNvPr id="2" name="Rectangle 1"/>
@@ -11858,6 +12109,7 @@
           <a:lstStyle/>
           <a:p>
             <a:pPr algn="ctr"/>
+            <a:endParaRPr/>
           </a:p>
         </p:txBody>
       </p:sp>
@@ -11971,6 +12223,7 @@
           <a:lstStyle/>
           <a:p>
             <a:pPr algn="ctr"/>
+            <a:endParaRPr/>
           </a:p>
         </p:txBody>
       </p:sp>
@@ -12247,6 +12500,7 @@
           <a:lstStyle/>
           <a:p>
             <a:pPr algn="ctr"/>
+            <a:endParaRPr/>
           </a:p>
         </p:txBody>
       </p:sp>
@@ -12477,7 +12731,7 @@
 </file>
 
 <file path=ppt/slides/slide3.xml><?xml version="1.0" encoding="utf-8"?>
-<p:sld xmlns:a="http://schemas.openxmlformats.org/drawingml/2006/main" xmlns:p="http://schemas.openxmlformats.org/presentationml/2006/main" xmlns:r="http://schemas.openxmlformats.org/officeDocument/2006/relationships">
+<p:sld xmlns:a="http://schemas.openxmlformats.org/drawingml/2006/main" xmlns:r="http://schemas.openxmlformats.org/officeDocument/2006/relationships" xmlns:p="http://schemas.openxmlformats.org/presentationml/2006/main">
   <p:cSld>
     <p:bg>
       <p:bgPr>
@@ -12493,7 +12747,14 @@
         <p:cNvGrpSpPr/>
         <p:nvPr/>
       </p:nvGrpSpPr>
-      <p:grpSpPr/>
+      <p:grpSpPr>
+        <a:xfrm>
+          <a:off x="0" y="0"/>
+          <a:ext cx="0" cy="0"/>
+          <a:chOff x="0" y="0"/>
+          <a:chExt cx="0" cy="0"/>
+        </a:xfrm>
+      </p:grpSpPr>
       <p:sp>
         <p:nvSpPr>
           <p:cNvPr id="2" name="Rectangle 1"/>
@@ -12534,6 +12795,7 @@
           <a:lstStyle/>
           <a:p>
             <a:pPr algn="ctr"/>
+            <a:endParaRPr/>
           </a:p>
         </p:txBody>
       </p:sp>
@@ -12647,6 +12909,7 @@
           <a:lstStyle/>
           <a:p>
             <a:pPr algn="ctr"/>
+            <a:endParaRPr/>
           </a:p>
         </p:txBody>
       </p:sp>
@@ -12760,6 +13023,7 @@
           <a:lstStyle/>
           <a:p>
             <a:pPr algn="ctr"/>
+            <a:endParaRPr/>
           </a:p>
         </p:txBody>
       </p:sp>
@@ -12873,6 +13137,7 @@
           <a:lstStyle/>
           <a:p>
             <a:pPr algn="ctr"/>
+            <a:endParaRPr/>
           </a:p>
         </p:txBody>
       </p:sp>
@@ -12986,6 +13251,7 @@
           <a:lstStyle/>
           <a:p>
             <a:pPr algn="ctr"/>
+            <a:endParaRPr/>
           </a:p>
         </p:txBody>
       </p:sp>
@@ -13099,6 +13365,7 @@
           <a:lstStyle/>
           <a:p>
             <a:pPr algn="ctr"/>
+            <a:endParaRPr/>
           </a:p>
         </p:txBody>
       </p:sp>
@@ -13188,8 +13455,8 @@
         </p:blipFill>
         <p:spPr>
           <a:xfrm>
-            <a:off x="274320" y="2377440"/>
-            <a:ext cx="10629900" cy="4114800"/>
+            <a:off x="86312" y="2423160"/>
+            <a:ext cx="7096536" cy="2747046"/>
           </a:xfrm>
           <a:prstGeom prst="rect">
             <a:avLst/>
@@ -13204,8 +13471,8 @@
         </p:nvSpPr>
         <p:spPr>
           <a:xfrm>
-            <a:off x="5029200" y="2423160"/>
-            <a:ext cx="6858000" cy="749808"/>
+            <a:off x="7313370" y="2423160"/>
+            <a:ext cx="4573830" cy="749808"/>
           </a:xfrm>
           <a:prstGeom prst="rect">
             <a:avLst/>
@@ -13236,6 +13503,7 @@
           <a:lstStyle/>
           <a:p>
             <a:pPr algn="ctr"/>
+            <a:endParaRPr/>
           </a:p>
         </p:txBody>
       </p:sp>
@@ -13247,8 +13515,8 @@
         </p:nvSpPr>
         <p:spPr>
           <a:xfrm>
-            <a:off x="5166360" y="2468880"/>
-            <a:ext cx="2560320" cy="685800"/>
+            <a:off x="7527242" y="2654100"/>
+            <a:ext cx="1707563" cy="307777"/>
           </a:xfrm>
           <a:prstGeom prst="rect">
             <a:avLst/>
@@ -13263,7 +13531,7 @@
           <a:p>
             <a:pPr algn="l"/>
             <a:r>
-              <a:rPr sz="1400" b="1" i="0">
+              <a:rPr sz="1400" b="1" i="0" dirty="0">
                 <a:solidFill>
                   <a:srgbClr val="C8A020"/>
                 </a:solidFill>
@@ -13282,8 +13550,8 @@
         </p:nvSpPr>
         <p:spPr>
           <a:xfrm>
-            <a:off x="7772400" y="2532888"/>
-            <a:ext cx="3931920" cy="594360"/>
+            <a:off x="9081990" y="2532888"/>
+            <a:ext cx="2622329" cy="492443"/>
           </a:xfrm>
           <a:prstGeom prst="rect">
             <a:avLst/>
@@ -13298,14 +13566,56 @@
           <a:p>
             <a:pPr algn="l"/>
             <a:r>
-              <a:rPr sz="1300" b="0" i="0">
+              <a:rPr sz="1300" b="0" i="0" dirty="0" err="1">
                 <a:solidFill>
                   <a:srgbClr val="B0C09A"/>
                 </a:solidFill>
                 <a:latin typeface="Calibri"/>
               </a:rPr>
-              <a:t>Reactieve web-UI · 24 pagina's · RBAC-beschermd</a:t>
-            </a:r>
+              <a:t>Reactieve</a:t>
+            </a:r>
+            <a:r>
+              <a:rPr sz="1300" b="0" i="0" dirty="0">
+                <a:solidFill>
+                  <a:srgbClr val="B0C09A"/>
+                </a:solidFill>
+                <a:latin typeface="Calibri"/>
+              </a:rPr>
+              <a:t> web-UI · 24 </a:t>
+            </a:r>
+            <a:r>
+              <a:rPr sz="1300" b="0" i="0" dirty="0" err="1">
+                <a:solidFill>
+                  <a:srgbClr val="B0C09A"/>
+                </a:solidFill>
+                <a:latin typeface="Calibri"/>
+              </a:rPr>
+              <a:t>pagina's</a:t>
+            </a:r>
+            <a:r>
+              <a:rPr sz="1300" b="0" i="0" dirty="0">
+                <a:solidFill>
+                  <a:srgbClr val="B0C09A"/>
+                </a:solidFill>
+                <a:latin typeface="Calibri"/>
+              </a:rPr>
+              <a:t> · RBAC-</a:t>
+            </a:r>
+            <a:r>
+              <a:rPr sz="1300" b="0" i="0" dirty="0" err="1">
+                <a:solidFill>
+                  <a:srgbClr val="B0C09A"/>
+                </a:solidFill>
+                <a:latin typeface="Calibri"/>
+              </a:rPr>
+              <a:t>beschermd</a:t>
+            </a:r>
+            <a:endParaRPr sz="1300" b="0" i="0" dirty="0">
+              <a:solidFill>
+                <a:srgbClr val="B0C09A"/>
+              </a:solidFill>
+              <a:latin typeface="Calibri"/>
+            </a:endParaRPr>
           </a:p>
         </p:txBody>
       </p:sp>
@@ -13317,8 +13627,8 @@
         </p:nvSpPr>
         <p:spPr>
           <a:xfrm>
-            <a:off x="5029200" y="3227832"/>
-            <a:ext cx="6858000" cy="749808"/>
+            <a:off x="7313370" y="3227832"/>
+            <a:ext cx="4573830" cy="749808"/>
           </a:xfrm>
           <a:prstGeom prst="rect">
             <a:avLst/>
@@ -13349,6 +13659,7 @@
           <a:lstStyle/>
           <a:p>
             <a:pPr algn="ctr"/>
+            <a:endParaRPr/>
           </a:p>
         </p:txBody>
       </p:sp>
@@ -13360,8 +13671,8 @@
         </p:nvSpPr>
         <p:spPr>
           <a:xfrm>
-            <a:off x="5166360" y="3273552"/>
-            <a:ext cx="2560320" cy="685800"/>
+            <a:off x="7527242" y="3335548"/>
+            <a:ext cx="1707563" cy="523220"/>
           </a:xfrm>
           <a:prstGeom prst="rect">
             <a:avLst/>
@@ -13376,14 +13687,29 @@
           <a:p>
             <a:pPr algn="l"/>
             <a:r>
-              <a:rPr sz="1400" b="1" i="0">
+              <a:rPr sz="1400" b="1" i="0" dirty="0">
                 <a:solidFill>
                   <a:srgbClr val="C8A020"/>
                 </a:solidFill>
                 <a:latin typeface="Calibri"/>
               </a:rPr>
-              <a:t>PostgreSQL + asyncpg</a:t>
-            </a:r>
+              <a:t>PostgreSQL + </a:t>
+            </a:r>
+            <a:r>
+              <a:rPr sz="1400" b="1" i="0" dirty="0" err="1">
+                <a:solidFill>
+                  <a:srgbClr val="C8A020"/>
+                </a:solidFill>
+                <a:latin typeface="Calibri"/>
+              </a:rPr>
+              <a:t>asyncpg</a:t>
+            </a:r>
+            <a:endParaRPr sz="1400" b="1" i="0" dirty="0">
+              <a:solidFill>
+                <a:srgbClr val="C8A020"/>
+              </a:solidFill>
+              <a:latin typeface="Calibri"/>
+            </a:endParaRPr>
           </a:p>
         </p:txBody>
       </p:sp>
@@ -13395,8 +13721,8 @@
         </p:nvSpPr>
         <p:spPr>
           <a:xfrm>
-            <a:off x="7772400" y="3337560"/>
-            <a:ext cx="3931920" cy="594360"/>
+            <a:off x="9081990" y="3337560"/>
+            <a:ext cx="2622329" cy="492443"/>
           </a:xfrm>
           <a:prstGeom prst="rect">
             <a:avLst/>
@@ -13430,8 +13756,8 @@
         </p:nvSpPr>
         <p:spPr>
           <a:xfrm>
-            <a:off x="5029200" y="4032504"/>
-            <a:ext cx="6858000" cy="749808"/>
+            <a:off x="7313370" y="4032504"/>
+            <a:ext cx="4573830" cy="749808"/>
           </a:xfrm>
           <a:prstGeom prst="rect">
             <a:avLst/>
@@ -13462,6 +13788,7 @@
           <a:lstStyle/>
           <a:p>
             <a:pPr algn="ctr"/>
+            <a:endParaRPr/>
           </a:p>
         </p:txBody>
       </p:sp>
@@ -13473,8 +13800,8 @@
         </p:nvSpPr>
         <p:spPr>
           <a:xfrm>
-            <a:off x="5166360" y="4078224"/>
-            <a:ext cx="2560320" cy="685800"/>
+            <a:off x="7527242" y="4232219"/>
+            <a:ext cx="1707563" cy="307777"/>
           </a:xfrm>
           <a:prstGeom prst="rect">
             <a:avLst/>
@@ -13489,7 +13816,7 @@
           <a:p>
             <a:pPr algn="l"/>
             <a:r>
-              <a:rPr sz="1400" b="1" i="0">
+              <a:rPr sz="1400" b="1" i="0" dirty="0">
                 <a:solidFill>
                   <a:srgbClr val="C8A020"/>
                 </a:solidFill>
@@ -13508,8 +13835,8 @@
         </p:nvSpPr>
         <p:spPr>
           <a:xfrm>
-            <a:off x="7772400" y="4142232"/>
-            <a:ext cx="3931920" cy="594360"/>
+            <a:off x="9081990" y="4142232"/>
+            <a:ext cx="2622329" cy="492443"/>
           </a:xfrm>
           <a:prstGeom prst="rect">
             <a:avLst/>
@@ -13543,8 +13870,8 @@
         </p:nvSpPr>
         <p:spPr>
           <a:xfrm>
-            <a:off x="5029200" y="4837176"/>
-            <a:ext cx="6858000" cy="749808"/>
+            <a:off x="7313370" y="4837176"/>
+            <a:ext cx="4573830" cy="749808"/>
           </a:xfrm>
           <a:prstGeom prst="rect">
             <a:avLst/>
@@ -13575,6 +13902,7 @@
           <a:lstStyle/>
           <a:p>
             <a:pPr algn="ctr"/>
+            <a:endParaRPr/>
           </a:p>
         </p:txBody>
       </p:sp>
@@ -13586,8 +13914,8 @@
         </p:nvSpPr>
         <p:spPr>
           <a:xfrm>
-            <a:off x="5166360" y="4882896"/>
-            <a:ext cx="2560320" cy="685800"/>
+            <a:off x="7527241" y="4980467"/>
+            <a:ext cx="1707563" cy="307777"/>
           </a:xfrm>
           <a:prstGeom prst="rect">
             <a:avLst/>
@@ -13602,7 +13930,7 @@
           <a:p>
             <a:pPr algn="l"/>
             <a:r>
-              <a:rPr sz="1400" b="1" i="0">
+              <a:rPr sz="1400" b="1" i="0" dirty="0" err="1">
                 <a:solidFill>
                   <a:srgbClr val="C8A020"/>
                 </a:solidFill>
@@ -13610,6 +13938,12 @@
               </a:rPr>
               <a:t>FastAPI</a:t>
             </a:r>
+            <a:endParaRPr sz="1400" b="1" i="0" dirty="0">
+              <a:solidFill>
+                <a:srgbClr val="C8A020"/>
+              </a:solidFill>
+              <a:latin typeface="Calibri"/>
+            </a:endParaRPr>
           </a:p>
         </p:txBody>
       </p:sp>
@@ -13621,8 +13955,8 @@
         </p:nvSpPr>
         <p:spPr>
           <a:xfrm>
-            <a:off x="7772400" y="4946904"/>
-            <a:ext cx="3931920" cy="594360"/>
+            <a:off x="9081990" y="4946904"/>
+            <a:ext cx="2622329" cy="492443"/>
           </a:xfrm>
           <a:prstGeom prst="rect">
             <a:avLst/>
@@ -13656,8 +13990,8 @@
         </p:nvSpPr>
         <p:spPr>
           <a:xfrm>
-            <a:off x="5029200" y="5641848"/>
-            <a:ext cx="6858000" cy="749808"/>
+            <a:off x="7313370" y="5641848"/>
+            <a:ext cx="4573830" cy="749808"/>
           </a:xfrm>
           <a:prstGeom prst="rect">
             <a:avLst/>
@@ -13688,6 +14022,7 @@
           <a:lstStyle/>
           <a:p>
             <a:pPr algn="ctr"/>
+            <a:endParaRPr/>
           </a:p>
         </p:txBody>
       </p:sp>
@@ -13699,8 +14034,8 @@
         </p:nvSpPr>
         <p:spPr>
           <a:xfrm>
-            <a:off x="5166360" y="5687568"/>
-            <a:ext cx="2560320" cy="685800"/>
+            <a:off x="7527240" y="5755142"/>
+            <a:ext cx="1707563" cy="523220"/>
           </a:xfrm>
           <a:prstGeom prst="rect">
             <a:avLst/>
@@ -13715,14 +14050,29 @@
           <a:p>
             <a:pPr algn="l"/>
             <a:r>
-              <a:rPr sz="1400" b="1" i="0">
+              <a:rPr sz="1400" b="1" i="0" dirty="0">
                 <a:solidFill>
                   <a:srgbClr val="C8A020"/>
                 </a:solidFill>
                 <a:latin typeface="Calibri"/>
               </a:rPr>
-              <a:t>HR Simulator + Mailpit</a:t>
-            </a:r>
+              <a:t>HR Simulator + </a:t>
+            </a:r>
+            <a:r>
+              <a:rPr sz="1400" b="1" i="0" dirty="0" err="1">
+                <a:solidFill>
+                  <a:srgbClr val="C8A020"/>
+                </a:solidFill>
+                <a:latin typeface="Calibri"/>
+              </a:rPr>
+              <a:t>Mailpit</a:t>
+            </a:r>
+            <a:endParaRPr sz="1400" b="1" i="0" dirty="0">
+              <a:solidFill>
+                <a:srgbClr val="C8A020"/>
+              </a:solidFill>
+              <a:latin typeface="Calibri"/>
+            </a:endParaRPr>
           </a:p>
         </p:txBody>
       </p:sp>
@@ -13734,8 +14084,8 @@
         </p:nvSpPr>
         <p:spPr>
           <a:xfrm>
-            <a:off x="7772400" y="5751576"/>
-            <a:ext cx="3931920" cy="594360"/>
+            <a:off x="9081990" y="5751576"/>
+            <a:ext cx="2622329" cy="492443"/>
           </a:xfrm>
           <a:prstGeom prst="rect">
             <a:avLst/>
@@ -13770,7 +14120,7 @@
 </file>
 
 <file path=ppt/slides/slide4.xml><?xml version="1.0" encoding="utf-8"?>
-<p:sld xmlns:a="http://schemas.openxmlformats.org/drawingml/2006/main" xmlns:p="http://schemas.openxmlformats.org/presentationml/2006/main" xmlns:r="http://schemas.openxmlformats.org/officeDocument/2006/relationships">
+<p:sld xmlns:a="http://schemas.openxmlformats.org/drawingml/2006/main" xmlns:r="http://schemas.openxmlformats.org/officeDocument/2006/relationships" xmlns:p="http://schemas.openxmlformats.org/presentationml/2006/main">
   <p:cSld>
     <p:bg>
       <p:bgPr>
@@ -13786,7 +14136,14 @@
         <p:cNvGrpSpPr/>
         <p:nvPr/>
       </p:nvGrpSpPr>
-      <p:grpSpPr/>
+      <p:grpSpPr>
+        <a:xfrm>
+          <a:off x="0" y="0"/>
+          <a:ext cx="0" cy="0"/>
+          <a:chOff x="0" y="0"/>
+          <a:chExt cx="0" cy="0"/>
+        </a:xfrm>
+      </p:grpSpPr>
       <p:sp>
         <p:nvSpPr>
           <p:cNvPr id="2" name="Rectangle 1"/>
@@ -13827,6 +14184,7 @@
           <a:lstStyle/>
           <a:p>
             <a:pPr algn="ctr"/>
+            <a:endParaRPr/>
           </a:p>
         </p:txBody>
       </p:sp>
@@ -13933,7 +14291,7 @@
 </file>
 
 <file path=ppt/slides/slide5.xml><?xml version="1.0" encoding="utf-8"?>
-<p:sld xmlns:a="http://schemas.openxmlformats.org/drawingml/2006/main" xmlns:p="http://schemas.openxmlformats.org/presentationml/2006/main" xmlns:r="http://schemas.openxmlformats.org/officeDocument/2006/relationships">
+<p:sld xmlns:a="http://schemas.openxmlformats.org/drawingml/2006/main" xmlns:r="http://schemas.openxmlformats.org/officeDocument/2006/relationships" xmlns:p="http://schemas.openxmlformats.org/presentationml/2006/main">
   <p:cSld>
     <p:bg>
       <p:bgPr>
@@ -13949,7 +14307,14 @@
         <p:cNvGrpSpPr/>
         <p:nvPr/>
       </p:nvGrpSpPr>
-      <p:grpSpPr/>
+      <p:grpSpPr>
+        <a:xfrm>
+          <a:off x="0" y="0"/>
+          <a:ext cx="0" cy="0"/>
+          <a:chOff x="0" y="0"/>
+          <a:chExt cx="0" cy="0"/>
+        </a:xfrm>
+      </p:grpSpPr>
       <p:sp>
         <p:nvSpPr>
           <p:cNvPr id="2" name="Rectangle 1"/>
@@ -13990,6 +14355,7 @@
           <a:lstStyle/>
           <a:p>
             <a:pPr algn="ctr"/>
+            <a:endParaRPr/>
           </a:p>
         </p:txBody>
       </p:sp>
@@ -14127,6 +14493,7 @@
           <a:lstStyle/>
           <a:p>
             <a:pPr algn="ctr"/>
+            <a:endParaRPr/>
           </a:p>
         </p:txBody>
       </p:sp>
@@ -14208,15 +14575,12 @@
                 <a:spcPts val="500"/>
               </a:spcAft>
             </a:pPr>
-            <a:r>
-              <a:rPr sz="1200">
-                <a:solidFill>
-                  <a:srgbClr val="B0C09A"/>
-                </a:solidFill>
-                <a:latin typeface="Calibri"/>
-              </a:rPr>
-              <a:t/>
-            </a:r>
+            <a:endParaRPr sz="1200">
+              <a:solidFill>
+                <a:srgbClr val="B0C09A"/>
+              </a:solidFill>
+              <a:latin typeface="Calibri"/>
+            </a:endParaRPr>
           </a:p>
           <a:p>
             <a:pPr algn="l">
@@ -14304,15 +14668,12 @@
                 <a:spcPts val="500"/>
               </a:spcAft>
             </a:pPr>
-            <a:r>
-              <a:rPr sz="1200">
-                <a:solidFill>
-                  <a:srgbClr val="B0C09A"/>
-                </a:solidFill>
-                <a:latin typeface="Calibri"/>
-              </a:rPr>
-              <a:t/>
-            </a:r>
+            <a:endParaRPr sz="1200">
+              <a:solidFill>
+                <a:srgbClr val="B0C09A"/>
+              </a:solidFill>
+              <a:latin typeface="Calibri"/>
+            </a:endParaRPr>
           </a:p>
           <a:p>
             <a:pPr algn="l">
@@ -14373,7 +14734,7 @@
 </file>
 
 <file path=ppt/slides/slide6.xml><?xml version="1.0" encoding="utf-8"?>
-<p:sld xmlns:a="http://schemas.openxmlformats.org/drawingml/2006/main" xmlns:p="http://schemas.openxmlformats.org/presentationml/2006/main" xmlns:r="http://schemas.openxmlformats.org/officeDocument/2006/relationships">
+<p:sld xmlns:a="http://schemas.openxmlformats.org/drawingml/2006/main" xmlns:r="http://schemas.openxmlformats.org/officeDocument/2006/relationships" xmlns:p="http://schemas.openxmlformats.org/presentationml/2006/main">
   <p:cSld>
     <p:bg>
       <p:bgPr>
@@ -14389,7 +14750,14 @@
         <p:cNvGrpSpPr/>
         <p:nvPr/>
       </p:nvGrpSpPr>
-      <p:grpSpPr/>
+      <p:grpSpPr>
+        <a:xfrm>
+          <a:off x="0" y="0"/>
+          <a:ext cx="0" cy="0"/>
+          <a:chOff x="0" y="0"/>
+          <a:chExt cx="0" cy="0"/>
+        </a:xfrm>
+      </p:grpSpPr>
       <p:sp>
         <p:nvSpPr>
           <p:cNvPr id="2" name="Rectangle 1"/>
@@ -14430,6 +14798,7 @@
           <a:lstStyle/>
           <a:p>
             <a:pPr algn="ctr"/>
+            <a:endParaRPr/>
           </a:p>
         </p:txBody>
       </p:sp>
@@ -14543,8 +14912,8 @@
         </p:blipFill>
         <p:spPr>
           <a:xfrm>
-            <a:off x="5971032" y="1234440"/>
-            <a:ext cx="5943600" cy="2578858"/>
+            <a:off x="4537817" y="1234439"/>
+            <a:ext cx="7376815" cy="3200713"/>
           </a:xfrm>
           <a:prstGeom prst="rect">
             <a:avLst/>
@@ -14630,7 +14999,7 @@
 </file>
 
 <file path=ppt/slides/slide7.xml><?xml version="1.0" encoding="utf-8"?>
-<p:sld xmlns:a="http://schemas.openxmlformats.org/drawingml/2006/main" xmlns:p="http://schemas.openxmlformats.org/presentationml/2006/main" xmlns:r="http://schemas.openxmlformats.org/officeDocument/2006/relationships">
+<p:sld xmlns:a="http://schemas.openxmlformats.org/drawingml/2006/main" xmlns:r="http://schemas.openxmlformats.org/officeDocument/2006/relationships" xmlns:p="http://schemas.openxmlformats.org/presentationml/2006/main">
   <p:cSld>
     <p:bg>
       <p:bgPr>
@@ -14646,7 +15015,14 @@
         <p:cNvGrpSpPr/>
         <p:nvPr/>
       </p:nvGrpSpPr>
-      <p:grpSpPr/>
+      <p:grpSpPr>
+        <a:xfrm>
+          <a:off x="0" y="0"/>
+          <a:ext cx="0" cy="0"/>
+          <a:chOff x="0" y="0"/>
+          <a:chExt cx="0" cy="0"/>
+        </a:xfrm>
+      </p:grpSpPr>
       <p:sp>
         <p:nvSpPr>
           <p:cNvPr id="2" name="Rectangle 1"/>
@@ -14687,6 +15063,7 @@
           <a:lstStyle/>
           <a:p>
             <a:pPr algn="ctr"/>
+            <a:endParaRPr/>
           </a:p>
         </p:txBody>
       </p:sp>
@@ -14779,9 +15156,27 @@
                 <a:tableStyleId>{5C22544A-7EE6-4342-B048-85BDC9FD1C3A}</a:tableStyleId>
               </a:tblPr>
               <a:tblGrid>
-                <a:gridCol w="1463040"/>
-                <a:gridCol w="2286000"/>
-                <a:gridCol w="3383280"/>
+                <a:gridCol w="1463040">
+                  <a:extLst>
+                    <a:ext uri="{9D8B030D-6E8A-4147-A177-3AD203B41FA5}">
+                      <a16:colId xmlns:a16="http://schemas.microsoft.com/office/drawing/2014/main" val="20000"/>
+                    </a:ext>
+                  </a:extLst>
+                </a:gridCol>
+                <a:gridCol w="2286000">
+                  <a:extLst>
+                    <a:ext uri="{9D8B030D-6E8A-4147-A177-3AD203B41FA5}">
+                      <a16:colId xmlns:a16="http://schemas.microsoft.com/office/drawing/2014/main" val="20001"/>
+                    </a:ext>
+                  </a:extLst>
+                </a:gridCol>
+                <a:gridCol w="3383280">
+                  <a:extLst>
+                    <a:ext uri="{9D8B030D-6E8A-4147-A177-3AD203B41FA5}">
+                      <a16:colId xmlns:a16="http://schemas.microsoft.com/office/drawing/2014/main" val="20002"/>
+                    </a:ext>
+                  </a:extLst>
+                </a:gridCol>
               </a:tblGrid>
               <a:tr h="613954">
                 <a:tc>
@@ -14791,7 +15186,7 @@
                     <a:p>
                       <a:pPr algn="ctr"/>
                       <a:r>
-                        <a:rPr b="1" sz="1500">
+                        <a:rPr sz="1500" b="1">
                           <a:solidFill>
                             <a:srgbClr val="C8A020"/>
                           </a:solidFill>
@@ -14801,7 +15196,7 @@
                       </a:r>
                     </a:p>
                   </a:txBody>
-                  <a:tcPr marT="38100" marB="38100" marL="63500" marR="63500">
+                  <a:tcPr marL="63500" marR="63500" marT="38100" marB="38100">
                     <a:solidFill>
                       <a:srgbClr val="3A5A3A"/>
                     </a:solidFill>
@@ -14814,7 +15209,7 @@
                     <a:p>
                       <a:pPr algn="ctr"/>
                       <a:r>
-                        <a:rPr b="1" sz="1500">
+                        <a:rPr sz="1500" b="1">
                           <a:solidFill>
                             <a:srgbClr val="C8A020"/>
                           </a:solidFill>
@@ -14824,7 +15219,7 @@
                       </a:r>
                     </a:p>
                   </a:txBody>
-                  <a:tcPr marT="38100" marB="38100" marL="63500" marR="63500">
+                  <a:tcPr marL="63500" marR="63500" marT="38100" marB="38100">
                     <a:solidFill>
                       <a:srgbClr val="3A5A3A"/>
                     </a:solidFill>
@@ -14837,7 +15232,7 @@
                     <a:p>
                       <a:pPr algn="ctr"/>
                       <a:r>
-                        <a:rPr b="1" sz="1500">
+                        <a:rPr sz="1500" b="1">
                           <a:solidFill>
                             <a:srgbClr val="C8A020"/>
                           </a:solidFill>
@@ -14847,12 +15242,17 @@
                       </a:r>
                     </a:p>
                   </a:txBody>
-                  <a:tcPr marT="38100" marB="38100" marL="63500" marR="63500">
+                  <a:tcPr marL="63500" marR="63500" marT="38100" marB="38100">
                     <a:solidFill>
                       <a:srgbClr val="3A5A3A"/>
                     </a:solidFill>
                   </a:tcPr>
                 </a:tc>
+                <a:extLst>
+                  <a:ext uri="{0D108BD9-81ED-4DB2-BD59-A6C34878D82A}">
+                    <a16:rowId xmlns:a16="http://schemas.microsoft.com/office/drawing/2014/main" val="10000"/>
+                  </a:ext>
+                </a:extLst>
               </a:tr>
               <a:tr h="613954">
                 <a:tc>
@@ -14872,7 +15272,7 @@
                       </a:r>
                     </a:p>
                   </a:txBody>
-                  <a:tcPr marT="38100" marB="38100" marL="63500" marR="63500">
+                  <a:tcPr marL="63500" marR="63500" marT="38100" marB="38100">
                     <a:solidFill>
                       <a:srgbClr val="243824"/>
                     </a:solidFill>
@@ -14895,7 +15295,7 @@
                       </a:r>
                     </a:p>
                   </a:txBody>
-                  <a:tcPr marT="38100" marB="38100" marL="63500" marR="63500">
+                  <a:tcPr marL="63500" marR="63500" marT="38100" marB="38100">
                     <a:solidFill>
                       <a:srgbClr val="243824"/>
                     </a:solidFill>
@@ -14918,12 +15318,17 @@
                       </a:r>
                     </a:p>
                   </a:txBody>
-                  <a:tcPr marT="38100" marB="38100" marL="63500" marR="63500">
+                  <a:tcPr marL="63500" marR="63500" marT="38100" marB="38100">
                     <a:solidFill>
                       <a:srgbClr val="243824"/>
                     </a:solidFill>
                   </a:tcPr>
                 </a:tc>
+                <a:extLst>
+                  <a:ext uri="{0D108BD9-81ED-4DB2-BD59-A6C34878D82A}">
+                    <a16:rowId xmlns:a16="http://schemas.microsoft.com/office/drawing/2014/main" val="10001"/>
+                  </a:ext>
+                </a:extLst>
               </a:tr>
               <a:tr h="613954">
                 <a:tc>
@@ -14943,7 +15348,7 @@
                       </a:r>
                     </a:p>
                   </a:txBody>
-                  <a:tcPr marT="38100" marB="38100" marL="63500" marR="63500">
+                  <a:tcPr marL="63500" marR="63500" marT="38100" marB="38100">
                     <a:solidFill>
                       <a:srgbClr val="2A402A"/>
                     </a:solidFill>
@@ -14966,7 +15371,7 @@
                       </a:r>
                     </a:p>
                   </a:txBody>
-                  <a:tcPr marT="38100" marB="38100" marL="63500" marR="63500">
+                  <a:tcPr marL="63500" marR="63500" marT="38100" marB="38100">
                     <a:solidFill>
                       <a:srgbClr val="2A402A"/>
                     </a:solidFill>
@@ -14989,12 +15394,17 @@
                       </a:r>
                     </a:p>
                   </a:txBody>
-                  <a:tcPr marT="38100" marB="38100" marL="63500" marR="63500">
+                  <a:tcPr marL="63500" marR="63500" marT="38100" marB="38100">
                     <a:solidFill>
                       <a:srgbClr val="2A402A"/>
                     </a:solidFill>
                   </a:tcPr>
                 </a:tc>
+                <a:extLst>
+                  <a:ext uri="{0D108BD9-81ED-4DB2-BD59-A6C34878D82A}">
+                    <a16:rowId xmlns:a16="http://schemas.microsoft.com/office/drawing/2014/main" val="10002"/>
+                  </a:ext>
+                </a:extLst>
               </a:tr>
               <a:tr h="613954">
                 <a:tc>
@@ -15014,7 +15424,7 @@
                       </a:r>
                     </a:p>
                   </a:txBody>
-                  <a:tcPr marT="38100" marB="38100" marL="63500" marR="63500">
+                  <a:tcPr marL="63500" marR="63500" marT="38100" marB="38100">
                     <a:solidFill>
                       <a:srgbClr val="243824"/>
                     </a:solidFill>
@@ -15037,7 +15447,7 @@
                       </a:r>
                     </a:p>
                   </a:txBody>
-                  <a:tcPr marT="38100" marB="38100" marL="63500" marR="63500">
+                  <a:tcPr marL="63500" marR="63500" marT="38100" marB="38100">
                     <a:solidFill>
                       <a:srgbClr val="243824"/>
                     </a:solidFill>
@@ -15060,12 +15470,17 @@
                       </a:r>
                     </a:p>
                   </a:txBody>
-                  <a:tcPr marT="38100" marB="38100" marL="63500" marR="63500">
+                  <a:tcPr marL="63500" marR="63500" marT="38100" marB="38100">
                     <a:solidFill>
                       <a:srgbClr val="243824"/>
                     </a:solidFill>
                   </a:tcPr>
                 </a:tc>
+                <a:extLst>
+                  <a:ext uri="{0D108BD9-81ED-4DB2-BD59-A6C34878D82A}">
+                    <a16:rowId xmlns:a16="http://schemas.microsoft.com/office/drawing/2014/main" val="10003"/>
+                  </a:ext>
+                </a:extLst>
               </a:tr>
               <a:tr h="613954">
                 <a:tc>
@@ -15085,7 +15500,7 @@
                       </a:r>
                     </a:p>
                   </a:txBody>
-                  <a:tcPr marT="38100" marB="38100" marL="63500" marR="63500">
+                  <a:tcPr marL="63500" marR="63500" marT="38100" marB="38100">
                     <a:solidFill>
                       <a:srgbClr val="2A402A"/>
                     </a:solidFill>
@@ -15108,7 +15523,7 @@
                       </a:r>
                     </a:p>
                   </a:txBody>
-                  <a:tcPr marT="38100" marB="38100" marL="63500" marR="63500">
+                  <a:tcPr marL="63500" marR="63500" marT="38100" marB="38100">
                     <a:solidFill>
                       <a:srgbClr val="2A402A"/>
                     </a:solidFill>
@@ -15131,12 +15546,17 @@
                       </a:r>
                     </a:p>
                   </a:txBody>
-                  <a:tcPr marT="38100" marB="38100" marL="63500" marR="63500">
+                  <a:tcPr marL="63500" marR="63500" marT="38100" marB="38100">
                     <a:solidFill>
                       <a:srgbClr val="2A402A"/>
                     </a:solidFill>
                   </a:tcPr>
                 </a:tc>
+                <a:extLst>
+                  <a:ext uri="{0D108BD9-81ED-4DB2-BD59-A6C34878D82A}">
+                    <a16:rowId xmlns:a16="http://schemas.microsoft.com/office/drawing/2014/main" val="10004"/>
+                  </a:ext>
+                </a:extLst>
               </a:tr>
               <a:tr h="613954">
                 <a:tc>
@@ -15156,7 +15576,7 @@
                       </a:r>
                     </a:p>
                   </a:txBody>
-                  <a:tcPr marT="38100" marB="38100" marL="63500" marR="63500">
+                  <a:tcPr marL="63500" marR="63500" marT="38100" marB="38100">
                     <a:solidFill>
                       <a:srgbClr val="243824"/>
                     </a:solidFill>
@@ -15179,7 +15599,7 @@
                       </a:r>
                     </a:p>
                   </a:txBody>
-                  <a:tcPr marT="38100" marB="38100" marL="63500" marR="63500">
+                  <a:tcPr marL="63500" marR="63500" marT="38100" marB="38100">
                     <a:solidFill>
                       <a:srgbClr val="243824"/>
                     </a:solidFill>
@@ -15202,12 +15622,17 @@
                       </a:r>
                     </a:p>
                   </a:txBody>
-                  <a:tcPr marT="38100" marB="38100" marL="63500" marR="63500">
+                  <a:tcPr marL="63500" marR="63500" marT="38100" marB="38100">
                     <a:solidFill>
                       <a:srgbClr val="243824"/>
                     </a:solidFill>
                   </a:tcPr>
                 </a:tc>
+                <a:extLst>
+                  <a:ext uri="{0D108BD9-81ED-4DB2-BD59-A6C34878D82A}">
+                    <a16:rowId xmlns:a16="http://schemas.microsoft.com/office/drawing/2014/main" val="10005"/>
+                  </a:ext>
+                </a:extLst>
               </a:tr>
               <a:tr h="613956">
                 <a:tc>
@@ -15227,7 +15652,7 @@
                       </a:r>
                     </a:p>
                   </a:txBody>
-                  <a:tcPr marT="38100" marB="38100" marL="63500" marR="63500">
+                  <a:tcPr marL="63500" marR="63500" marT="38100" marB="38100">
                     <a:solidFill>
                       <a:srgbClr val="2A402A"/>
                     </a:solidFill>
@@ -15250,7 +15675,7 @@
                       </a:r>
                     </a:p>
                   </a:txBody>
-                  <a:tcPr marT="38100" marB="38100" marL="63500" marR="63500">
+                  <a:tcPr marL="63500" marR="63500" marT="38100" marB="38100">
                     <a:solidFill>
                       <a:srgbClr val="2A402A"/>
                     </a:solidFill>
@@ -15273,12 +15698,17 @@
                       </a:r>
                     </a:p>
                   </a:txBody>
-                  <a:tcPr marT="38100" marB="38100" marL="63500" marR="63500">
+                  <a:tcPr marL="63500" marR="63500" marT="38100" marB="38100">
                     <a:solidFill>
                       <a:srgbClr val="2A402A"/>
                     </a:solidFill>
                   </a:tcPr>
                 </a:tc>
+                <a:extLst>
+                  <a:ext uri="{0D108BD9-81ED-4DB2-BD59-A6C34878D82A}">
+                    <a16:rowId xmlns:a16="http://schemas.microsoft.com/office/drawing/2014/main" val="10006"/>
+                  </a:ext>
+                </a:extLst>
               </a:tr>
             </a:tbl>
           </a:graphicData>
@@ -15324,6 +15754,7 @@
           <a:lstStyle/>
           <a:p>
             <a:pPr algn="ctr"/>
+            <a:endParaRPr/>
           </a:p>
         </p:txBody>
       </p:sp>
@@ -15594,7 +16025,7 @@
 </file>
 
 <file path=ppt/slides/slide8.xml><?xml version="1.0" encoding="utf-8"?>
-<p:sld xmlns:a="http://schemas.openxmlformats.org/drawingml/2006/main" xmlns:p="http://schemas.openxmlformats.org/presentationml/2006/main" xmlns:r="http://schemas.openxmlformats.org/officeDocument/2006/relationships">
+<p:sld xmlns:a="http://schemas.openxmlformats.org/drawingml/2006/main" xmlns:r="http://schemas.openxmlformats.org/officeDocument/2006/relationships" xmlns:p="http://schemas.openxmlformats.org/presentationml/2006/main">
   <p:cSld>
     <p:bg>
       <p:bgPr>
@@ -15610,7 +16041,14 @@
         <p:cNvGrpSpPr/>
         <p:nvPr/>
       </p:nvGrpSpPr>
-      <p:grpSpPr/>
+      <p:grpSpPr>
+        <a:xfrm>
+          <a:off x="0" y="0"/>
+          <a:ext cx="0" cy="0"/>
+          <a:chOff x="0" y="0"/>
+          <a:chExt cx="0" cy="0"/>
+        </a:xfrm>
+      </p:grpSpPr>
       <p:sp>
         <p:nvSpPr>
           <p:cNvPr id="2" name="Rectangle 1"/>
@@ -15651,6 +16089,7 @@
           <a:lstStyle/>
           <a:p>
             <a:pPr algn="ctr"/>
+            <a:endParaRPr/>
           </a:p>
         </p:txBody>
       </p:sp>
@@ -15764,6 +16203,7 @@
           <a:lstStyle/>
           <a:p>
             <a:pPr algn="ctr"/>
+            <a:endParaRPr/>
           </a:p>
         </p:txBody>
       </p:sp>
@@ -15842,6 +16282,7 @@
           <a:lstStyle/>
           <a:p>
             <a:pPr algn="ctr"/>
+            <a:endParaRPr/>
           </a:p>
         </p:txBody>
       </p:sp>
@@ -15972,6 +16413,7 @@
           <a:lstStyle/>
           <a:p>
             <a:pPr algn="ctr"/>
+            <a:endParaRPr/>
           </a:p>
         </p:txBody>
       </p:sp>
@@ -16050,6 +16492,7 @@
           <a:lstStyle/>
           <a:p>
             <a:pPr algn="ctr"/>
+            <a:endParaRPr/>
           </a:p>
         </p:txBody>
       </p:sp>
@@ -16164,6 +16607,7 @@
           <a:lstStyle/>
           <a:p>
             <a:pPr algn="ctr"/>
+            <a:endParaRPr/>
           </a:p>
         </p:txBody>
       </p:sp>
@@ -16242,6 +16686,7 @@
           <a:lstStyle/>
           <a:p>
             <a:pPr algn="ctr"/>
+            <a:endParaRPr/>
           </a:p>
         </p:txBody>
       </p:sp>
@@ -16356,6 +16801,7 @@
           <a:lstStyle/>
           <a:p>
             <a:pPr algn="ctr"/>
+            <a:endParaRPr/>
           </a:p>
         </p:txBody>
       </p:sp>
@@ -16434,6 +16880,7 @@
           <a:lstStyle/>
           <a:p>
             <a:pPr algn="ctr"/>
+            <a:endParaRPr/>
           </a:p>
         </p:txBody>
       </p:sp>
@@ -16548,6 +16995,7 @@
           <a:lstStyle/>
           <a:p>
             <a:pPr algn="ctr"/>
+            <a:endParaRPr/>
           </a:p>
         </p:txBody>
       </p:sp>
@@ -16626,6 +17074,7 @@
           <a:lstStyle/>
           <a:p>
             <a:pPr algn="ctr"/>
+            <a:endParaRPr/>
           </a:p>
         </p:txBody>
       </p:sp>
@@ -16871,7 +17320,7 @@
 </file>
 
 <file path=ppt/slides/slide9.xml><?xml version="1.0" encoding="utf-8"?>
-<p:sld xmlns:a="http://schemas.openxmlformats.org/drawingml/2006/main" xmlns:p="http://schemas.openxmlformats.org/presentationml/2006/main" xmlns:r="http://schemas.openxmlformats.org/officeDocument/2006/relationships">
+<p:sld xmlns:a="http://schemas.openxmlformats.org/drawingml/2006/main" xmlns:r="http://schemas.openxmlformats.org/officeDocument/2006/relationships" xmlns:p="http://schemas.openxmlformats.org/presentationml/2006/main">
   <p:cSld>
     <p:bg>
       <p:bgPr>
@@ -16887,7 +17336,14 @@
         <p:cNvGrpSpPr/>
         <p:nvPr/>
       </p:nvGrpSpPr>
-      <p:grpSpPr/>
+      <p:grpSpPr>
+        <a:xfrm>
+          <a:off x="0" y="0"/>
+          <a:ext cx="0" cy="0"/>
+          <a:chOff x="0" y="0"/>
+          <a:chExt cx="0" cy="0"/>
+        </a:xfrm>
+      </p:grpSpPr>
       <p:sp>
         <p:nvSpPr>
           <p:cNvPr id="2" name="Rectangle 1"/>
@@ -16928,6 +17384,7 @@
           <a:lstStyle/>
           <a:p>
             <a:pPr algn="ctr"/>
+            <a:endParaRPr/>
           </a:p>
         </p:txBody>
       </p:sp>
@@ -17076,6 +17533,7 @@
           <a:lstStyle/>
           <a:p>
             <a:pPr algn="ctr"/>
+            <a:endParaRPr/>
           </a:p>
         </p:txBody>
       </p:sp>
@@ -17289,6 +17747,7 @@
           <a:lstStyle/>
           <a:p>
             <a:pPr algn="ctr"/>
+            <a:endParaRPr/>
           </a:p>
         </p:txBody>
       </p:sp>

--- a/documentation/WarriorFit_Presentatie_10min_NL.pptx
+++ b/documentation/WarriorFit_Presentatie_10min_NL.pptx
@@ -319,7 +319,7 @@
           <a:p>
             <a:fld id="{5BCAD085-E8A6-8845-BD4E-CB4CCA059FC4}" type="datetimeFigureOut">
               <a:rPr lang="en-US" smtClean="0"/>
-              <a:t>5/31/26</a:t>
+              <a:t>6/14/26</a:t>
             </a:fld>
             <a:endParaRPr lang="en-US"/>
           </a:p>
@@ -487,7 +487,7 @@
           <a:p>
             <a:fld id="{5BCAD085-E8A6-8845-BD4E-CB4CCA059FC4}" type="datetimeFigureOut">
               <a:rPr lang="en-US" smtClean="0"/>
-              <a:t>5/31/26</a:t>
+              <a:t>6/14/26</a:t>
             </a:fld>
             <a:endParaRPr lang="en-US"/>
           </a:p>
@@ -665,7 +665,7 @@
           <a:p>
             <a:fld id="{5BCAD085-E8A6-8845-BD4E-CB4CCA059FC4}" type="datetimeFigureOut">
               <a:rPr lang="en-US" smtClean="0"/>
-              <a:t>5/31/26</a:t>
+              <a:t>6/14/26</a:t>
             </a:fld>
             <a:endParaRPr lang="en-US"/>
           </a:p>
@@ -833,7 +833,7 @@
           <a:p>
             <a:fld id="{5BCAD085-E8A6-8845-BD4E-CB4CCA059FC4}" type="datetimeFigureOut">
               <a:rPr lang="en-US" smtClean="0"/>
-              <a:t>5/31/26</a:t>
+              <a:t>6/14/26</a:t>
             </a:fld>
             <a:endParaRPr lang="en-US"/>
           </a:p>
@@ -1078,7 +1078,7 @@
           <a:p>
             <a:fld id="{5BCAD085-E8A6-8845-BD4E-CB4CCA059FC4}" type="datetimeFigureOut">
               <a:rPr lang="en-US" smtClean="0"/>
-              <a:t>5/31/26</a:t>
+              <a:t>6/14/26</a:t>
             </a:fld>
             <a:endParaRPr lang="en-US"/>
           </a:p>
@@ -1363,7 +1363,7 @@
           <a:p>
             <a:fld id="{5BCAD085-E8A6-8845-BD4E-CB4CCA059FC4}" type="datetimeFigureOut">
               <a:rPr lang="en-US" smtClean="0"/>
-              <a:t>5/31/26</a:t>
+              <a:t>6/14/26</a:t>
             </a:fld>
             <a:endParaRPr lang="en-US"/>
           </a:p>
@@ -1782,7 +1782,7 @@
           <a:p>
             <a:fld id="{5BCAD085-E8A6-8845-BD4E-CB4CCA059FC4}" type="datetimeFigureOut">
               <a:rPr lang="en-US" smtClean="0"/>
-              <a:t>5/31/26</a:t>
+              <a:t>6/14/26</a:t>
             </a:fld>
             <a:endParaRPr lang="en-US"/>
           </a:p>
@@ -1899,7 +1899,7 @@
           <a:p>
             <a:fld id="{5BCAD085-E8A6-8845-BD4E-CB4CCA059FC4}" type="datetimeFigureOut">
               <a:rPr lang="en-US" smtClean="0"/>
-              <a:t>5/31/26</a:t>
+              <a:t>6/14/26</a:t>
             </a:fld>
             <a:endParaRPr lang="en-US"/>
           </a:p>
@@ -1994,7 +1994,7 @@
           <a:p>
             <a:fld id="{5BCAD085-E8A6-8845-BD4E-CB4CCA059FC4}" type="datetimeFigureOut">
               <a:rPr lang="en-US" smtClean="0"/>
-              <a:t>5/31/26</a:t>
+              <a:t>6/14/26</a:t>
             </a:fld>
             <a:endParaRPr lang="en-US"/>
           </a:p>
@@ -2269,7 +2269,7 @@
           <a:p>
             <a:fld id="{5BCAD085-E8A6-8845-BD4E-CB4CCA059FC4}" type="datetimeFigureOut">
               <a:rPr lang="en-US" smtClean="0"/>
-              <a:t>5/31/26</a:t>
+              <a:t>6/14/26</a:t>
             </a:fld>
             <a:endParaRPr lang="en-US"/>
           </a:p>
@@ -2521,7 +2521,7 @@
           <a:p>
             <a:fld id="{5BCAD085-E8A6-8845-BD4E-CB4CCA059FC4}" type="datetimeFigureOut">
               <a:rPr lang="en-US" smtClean="0"/>
-              <a:t>5/31/26</a:t>
+              <a:t>6/14/26</a:t>
             </a:fld>
             <a:endParaRPr lang="en-US"/>
           </a:p>
@@ -2732,7 +2732,7 @@
           <a:p>
             <a:fld id="{5BCAD085-E8A6-8845-BD4E-CB4CCA059FC4}" type="datetimeFigureOut">
               <a:rPr lang="en-US" smtClean="0"/>
-              <a:t>5/31/26</a:t>
+              <a:t>6/14/26</a:t>
             </a:fld>
             <a:endParaRPr lang="en-US"/>
           </a:p>
@@ -15185,8 +15185,8 @@
         </p:blipFill>
         <p:spPr>
           <a:xfrm>
-            <a:off x="274320" y="1234440"/>
-            <a:ext cx="6858000" cy="3644774"/>
+            <a:off x="274318" y="1234439"/>
+            <a:ext cx="7271617" cy="3696483"/>
           </a:xfrm>
           <a:prstGeom prst="rect">
             <a:avLst/>
@@ -15201,8 +15201,8 @@
         </p:nvSpPr>
         <p:spPr>
           <a:xfrm>
-            <a:off x="7498079" y="1234440"/>
-            <a:ext cx="4434840" cy="5394960"/>
+            <a:off x="7680959" y="1234439"/>
+            <a:ext cx="4181883" cy="5394960"/>
           </a:xfrm>
           <a:prstGeom prst="rect">
             <a:avLst/>
@@ -15261,7 +15261,7 @@
           <a:p>
             <a:pPr algn="l"/>
             <a:r>
-              <a:rPr sz="1500" b="1" i="0">
+              <a:rPr sz="1500" b="1" i="0" dirty="0">
                 <a:solidFill>
                   <a:srgbClr val="C8A020"/>
                 </a:solidFill>
@@ -15300,14 +15300,56 @@
               </a:spcAft>
             </a:pPr>
             <a:r>
-              <a:rPr sz="1200">
+              <a:rPr sz="1200" dirty="0" err="1">
                 <a:solidFill>
                   <a:srgbClr val="B0C09A"/>
                 </a:solidFill>
                 <a:latin typeface="Calibri"/>
               </a:rPr>
-              <a:t>providers.Singleton(…) — gedeeld over proceslevensduur</a:t>
-            </a:r>
+              <a:t>providers.Singleton</a:t>
+            </a:r>
+            <a:r>
+              <a:rPr sz="1200" dirty="0">
+                <a:solidFill>
+                  <a:srgbClr val="B0C09A"/>
+                </a:solidFill>
+                <a:latin typeface="Calibri"/>
+              </a:rPr>
+              <a:t>(…) — </a:t>
+            </a:r>
+            <a:r>
+              <a:rPr sz="1200" dirty="0" err="1">
+                <a:solidFill>
+                  <a:srgbClr val="B0C09A"/>
+                </a:solidFill>
+                <a:latin typeface="Calibri"/>
+              </a:rPr>
+              <a:t>gedeeld</a:t>
+            </a:r>
+            <a:r>
+              <a:rPr sz="1200" dirty="0">
+                <a:solidFill>
+                  <a:srgbClr val="B0C09A"/>
+                </a:solidFill>
+                <a:latin typeface="Calibri"/>
+              </a:rPr>
+              <a:t> over </a:t>
+            </a:r>
+            <a:r>
+              <a:rPr sz="1200" dirty="0" err="1">
+                <a:solidFill>
+                  <a:srgbClr val="B0C09A"/>
+                </a:solidFill>
+                <a:latin typeface="Calibri"/>
+              </a:rPr>
+              <a:t>proceslevensduur</a:t>
+            </a:r>
+            <a:endParaRPr sz="1200" dirty="0">
+              <a:solidFill>
+                <a:srgbClr val="B0C09A"/>
+              </a:solidFill>
+              <a:latin typeface="Calibri"/>
+            </a:endParaRPr>
           </a:p>
           <a:p>
             <a:pPr algn="l">
@@ -15315,7 +15357,7 @@
                 <a:spcPts val="500"/>
               </a:spcAft>
             </a:pPr>
-            <a:endParaRPr sz="1200">
+            <a:endParaRPr sz="1200" dirty="0">
               <a:solidFill>
                 <a:srgbClr val="B0C09A"/>
               </a:solidFill>
@@ -15329,13 +15371,49 @@
               </a:spcAft>
             </a:pPr>
             <a:r>
-              <a:rPr sz="1200">
+              <a:rPr sz="1200" dirty="0">
                 <a:solidFill>
                   <a:srgbClr val="B0C09A"/>
                 </a:solidFill>
                 <a:latin typeface="Calibri"/>
               </a:rPr>
-              <a:t>Repositories (8):  UserRepository, FitnessTestRepository …</a:t>
+              <a:t>Repositories (8):  </a:t>
+            </a:r>
+            <a:r>
+              <a:rPr sz="1200" dirty="0" err="1">
+                <a:solidFill>
+                  <a:srgbClr val="B0C09A"/>
+                </a:solidFill>
+                <a:latin typeface="Calibri"/>
+              </a:rPr>
+              <a:t>UserRepository</a:t>
+            </a:r>
+            <a:r>
+              <a:rPr sz="1200" dirty="0">
+                <a:solidFill>
+                  <a:srgbClr val="B0C09A"/>
+                </a:solidFill>
+                <a:latin typeface="Calibri"/>
+              </a:rPr>
+              <a:t>, </a:t>
+            </a:r>
+            <a:r>
+              <a:rPr sz="1200" dirty="0" err="1">
+                <a:solidFill>
+                  <a:srgbClr val="B0C09A"/>
+                </a:solidFill>
+                <a:latin typeface="Calibri"/>
+              </a:rPr>
+              <a:t>FitnessTestRepository</a:t>
+            </a:r>
+            <a:r>
+              <a:rPr sz="1200" dirty="0">
+                <a:solidFill>
+                  <a:srgbClr val="B0C09A"/>
+                </a:solidFill>
+                <a:latin typeface="Calibri"/>
+              </a:rPr>
+              <a:t> …</a:t>
             </a:r>
           </a:p>
           <a:p>
@@ -15345,13 +15423,67 @@
               </a:spcAft>
             </a:pPr>
             <a:r>
-              <a:rPr sz="1200">
+              <a:rPr sz="1200" dirty="0">
                 <a:solidFill>
                   <a:srgbClr val="B0C09A"/>
                 </a:solidFill>
                 <a:latin typeface="Calibri"/>
               </a:rPr>
-              <a:t>Services (12+):    ServiceTest, GdprService, RetentionService …</a:t>
+              <a:t>Services (12+):    </a:t>
+            </a:r>
+            <a:r>
+              <a:rPr sz="1200" dirty="0" err="1">
+                <a:solidFill>
+                  <a:srgbClr val="B0C09A"/>
+                </a:solidFill>
+                <a:latin typeface="Calibri"/>
+              </a:rPr>
+              <a:t>ServiceTest</a:t>
+            </a:r>
+            <a:r>
+              <a:rPr sz="1200" dirty="0">
+                <a:solidFill>
+                  <a:srgbClr val="B0C09A"/>
+                </a:solidFill>
+                <a:latin typeface="Calibri"/>
+              </a:rPr>
+              <a:t>, </a:t>
+            </a:r>
+            <a:r>
+              <a:rPr sz="1200" dirty="0" err="1">
+                <a:solidFill>
+                  <a:srgbClr val="B0C09A"/>
+                </a:solidFill>
+                <a:latin typeface="Calibri"/>
+              </a:rPr>
+              <a:t>GdprService</a:t>
+            </a:r>
+            <a:r>
+              <a:rPr sz="1200" dirty="0">
+                <a:solidFill>
+                  <a:srgbClr val="B0C09A"/>
+                </a:solidFill>
+                <a:latin typeface="Calibri"/>
+              </a:rPr>
+              <a:t>, </a:t>
+            </a:r>
+            <a:r>
+              <a:rPr sz="1200" dirty="0" err="1">
+                <a:solidFill>
+                  <a:srgbClr val="B0C09A"/>
+                </a:solidFill>
+                <a:latin typeface="Calibri"/>
+              </a:rPr>
+              <a:t>RetentionService</a:t>
+            </a:r>
+            <a:r>
+              <a:rPr sz="1200" dirty="0">
+                <a:solidFill>
+                  <a:srgbClr val="B0C09A"/>
+                </a:solidFill>
+                <a:latin typeface="Calibri"/>
+              </a:rPr>
+              <a:t> …</a:t>
             </a:r>
           </a:p>
           <a:p>
@@ -15361,13 +15493,49 @@
               </a:spcAft>
             </a:pPr>
             <a:r>
-              <a:rPr sz="1200">
+              <a:rPr sz="1200" dirty="0">
                 <a:solidFill>
                   <a:srgbClr val="B0C09A"/>
                 </a:solidFill>
                 <a:latin typeface="Calibri"/>
               </a:rPr>
-              <a:t>Controllers (5):   PhefController, CrossController …</a:t>
+              <a:t>Controllers (5):   </a:t>
+            </a:r>
+            <a:r>
+              <a:rPr sz="1200" dirty="0" err="1">
+                <a:solidFill>
+                  <a:srgbClr val="B0C09A"/>
+                </a:solidFill>
+                <a:latin typeface="Calibri"/>
+              </a:rPr>
+              <a:t>PhefController</a:t>
+            </a:r>
+            <a:r>
+              <a:rPr sz="1200" dirty="0">
+                <a:solidFill>
+                  <a:srgbClr val="B0C09A"/>
+                </a:solidFill>
+                <a:latin typeface="Calibri"/>
+              </a:rPr>
+              <a:t>, </a:t>
+            </a:r>
+            <a:r>
+              <a:rPr sz="1200" dirty="0" err="1">
+                <a:solidFill>
+                  <a:srgbClr val="B0C09A"/>
+                </a:solidFill>
+                <a:latin typeface="Calibri"/>
+              </a:rPr>
+              <a:t>CrossController</a:t>
+            </a:r>
+            <a:r>
+              <a:rPr sz="1200" dirty="0">
+                <a:solidFill>
+                  <a:srgbClr val="B0C09A"/>
+                </a:solidFill>
+                <a:latin typeface="Calibri"/>
+              </a:rPr>
+              <a:t> …</a:t>
             </a:r>
           </a:p>
           <a:p>
@@ -15377,14 +15545,65 @@
               </a:spcAft>
             </a:pPr>
             <a:r>
-              <a:rPr sz="1200">
+              <a:rPr sz="1200" dirty="0">
                 <a:solidFill>
                   <a:srgbClr val="B0C09A"/>
                 </a:solidFill>
                 <a:latin typeface="Calibri"/>
               </a:rPr>
-              <a:t>External:          BEMILService, MailService, NotifyMail</a:t>
-            </a:r>
+              <a:t>External:          </a:t>
+            </a:r>
+            <a:r>
+              <a:rPr sz="1200" dirty="0" err="1">
+                <a:solidFill>
+                  <a:srgbClr val="B0C09A"/>
+                </a:solidFill>
+                <a:latin typeface="Calibri"/>
+              </a:rPr>
+              <a:t>BEMILService</a:t>
+            </a:r>
+            <a:r>
+              <a:rPr sz="1200" dirty="0">
+                <a:solidFill>
+                  <a:srgbClr val="B0C09A"/>
+                </a:solidFill>
+                <a:latin typeface="Calibri"/>
+              </a:rPr>
+              <a:t>, </a:t>
+            </a:r>
+            <a:r>
+              <a:rPr sz="1200" dirty="0" err="1">
+                <a:solidFill>
+                  <a:srgbClr val="B0C09A"/>
+                </a:solidFill>
+                <a:latin typeface="Calibri"/>
+              </a:rPr>
+              <a:t>MailService</a:t>
+            </a:r>
+            <a:r>
+              <a:rPr sz="1200" dirty="0">
+                <a:solidFill>
+                  <a:srgbClr val="B0C09A"/>
+                </a:solidFill>
+                <a:latin typeface="Calibri"/>
+              </a:rPr>
+              <a:t>, </a:t>
+            </a:r>
+            <a:r>
+              <a:rPr sz="1200" dirty="0" err="1">
+                <a:solidFill>
+                  <a:srgbClr val="B0C09A"/>
+                </a:solidFill>
+                <a:latin typeface="Calibri"/>
+              </a:rPr>
+              <a:t>NotifyMail</a:t>
+            </a:r>
+            <a:endParaRPr sz="1200" dirty="0">
+              <a:solidFill>
+                <a:srgbClr val="B0C09A"/>
+              </a:solidFill>
+              <a:latin typeface="Calibri"/>
+            </a:endParaRPr>
           </a:p>
           <a:p>
             <a:pPr algn="l">
@@ -15393,13 +15612,31 @@
               </a:spcAft>
             </a:pPr>
             <a:r>
-              <a:rPr sz="1200">
+              <a:rPr sz="1200" dirty="0">
                 <a:solidFill>
                   <a:srgbClr val="B0C09A"/>
                 </a:solidFill>
                 <a:latin typeface="Calibri"/>
               </a:rPr>
-              <a:t>Broker:            Transactionele outbox singleton</a:t>
+              <a:t>Broker:            </a:t>
+            </a:r>
+            <a:r>
+              <a:rPr sz="1200" dirty="0" err="1">
+                <a:solidFill>
+                  <a:srgbClr val="B0C09A"/>
+                </a:solidFill>
+                <a:latin typeface="Calibri"/>
+              </a:rPr>
+              <a:t>Transactionele</a:t>
+            </a:r>
+            <a:r>
+              <a:rPr sz="1200" dirty="0">
+                <a:solidFill>
+                  <a:srgbClr val="B0C09A"/>
+                </a:solidFill>
+                <a:latin typeface="Calibri"/>
+              </a:rPr>
+              <a:t> outbox singleton</a:t>
             </a:r>
           </a:p>
           <a:p>
@@ -15408,7 +15645,7 @@
                 <a:spcPts val="500"/>
               </a:spcAft>
             </a:pPr>
-            <a:endParaRPr sz="1200">
+            <a:endParaRPr sz="1200" dirty="0">
               <a:solidFill>
                 <a:srgbClr val="B0C09A"/>
               </a:solidFill>
@@ -15422,13 +15659,31 @@
               </a:spcAft>
             </a:pPr>
             <a:r>
-              <a:rPr sz="1200">
+              <a:rPr sz="1200" dirty="0">
                 <a:solidFill>
                   <a:srgbClr val="B0C09A"/>
                 </a:solidFill>
                 <a:latin typeface="Calibri"/>
               </a:rPr>
-              <a:t>Wiring: containers.WiringConfiguration(modules=[…])</a:t>
+              <a:t>Wiring: </a:t>
+            </a:r>
+            <a:r>
+              <a:rPr sz="1200" dirty="0" err="1">
+                <a:solidFill>
+                  <a:srgbClr val="B0C09A"/>
+                </a:solidFill>
+                <a:latin typeface="Calibri"/>
+              </a:rPr>
+              <a:t>containers.WiringConfiguration</a:t>
+            </a:r>
+            <a:r>
+              <a:rPr sz="1200" dirty="0">
+                <a:solidFill>
+                  <a:srgbClr val="B0C09A"/>
+                </a:solidFill>
+                <a:latin typeface="Calibri"/>
+              </a:rPr>
+              <a:t>(modules=[…])</a:t>
             </a:r>
           </a:p>
           <a:p>
@@ -15438,14 +15693,65 @@
               </a:spcAft>
             </a:pPr>
             <a:r>
-              <a:rPr sz="1200">
+              <a:rPr sz="1200" dirty="0">
                 <a:solidFill>
                   <a:srgbClr val="B0C09A"/>
                 </a:solidFill>
                 <a:latin typeface="Calibri"/>
               </a:rPr>
-              <a:t>  → 25 UI-modules gepatch bij opstart</a:t>
-            </a:r>
+              <a:t>  → 25 UI-modules </a:t>
+            </a:r>
+            <a:r>
+              <a:rPr sz="1200" dirty="0" err="1">
+                <a:solidFill>
+                  <a:srgbClr val="B0C09A"/>
+                </a:solidFill>
+                <a:latin typeface="Calibri"/>
+              </a:rPr>
+              <a:t>gepatch</a:t>
+            </a:r>
+            <a:r>
+              <a:rPr sz="1200" dirty="0">
+                <a:solidFill>
+                  <a:srgbClr val="B0C09A"/>
+                </a:solidFill>
+                <a:latin typeface="Calibri"/>
+              </a:rPr>
+              <a:t> </a:t>
+            </a:r>
+            <a:r>
+              <a:rPr sz="1200" dirty="0" err="1">
+                <a:solidFill>
+                  <a:srgbClr val="B0C09A"/>
+                </a:solidFill>
+                <a:latin typeface="Calibri"/>
+              </a:rPr>
+              <a:t>bij</a:t>
+            </a:r>
+            <a:r>
+              <a:rPr sz="1200" dirty="0">
+                <a:solidFill>
+                  <a:srgbClr val="B0C09A"/>
+                </a:solidFill>
+                <a:latin typeface="Calibri"/>
+              </a:rPr>
+              <a:t> </a:t>
+            </a:r>
+            <a:r>
+              <a:rPr sz="1200" dirty="0" err="1">
+                <a:solidFill>
+                  <a:srgbClr val="B0C09A"/>
+                </a:solidFill>
+                <a:latin typeface="Calibri"/>
+              </a:rPr>
+              <a:t>opstart</a:t>
+            </a:r>
+            <a:endParaRPr sz="1200" dirty="0">
+              <a:solidFill>
+                <a:srgbClr val="B0C09A"/>
+              </a:solidFill>
+              <a:latin typeface="Calibri"/>
+            </a:endParaRPr>
           </a:p>
           <a:p>
             <a:pPr algn="l">
@@ -15454,13 +15760,49 @@
               </a:spcAft>
             </a:pPr>
             <a:r>
-              <a:rPr sz="1200">
+              <a:rPr sz="1200" dirty="0">
                 <a:solidFill>
                   <a:srgbClr val="B0C09A"/>
                 </a:solidFill>
                 <a:latin typeface="Calibri"/>
               </a:rPr>
-              <a:t>  → @inject + Provide[Container.xxx] op page __init__</a:t>
+              <a:t>  → @inject + Provide[</a:t>
+            </a:r>
+            <a:r>
+              <a:rPr sz="1200" dirty="0" err="1">
+                <a:solidFill>
+                  <a:srgbClr val="B0C09A"/>
+                </a:solidFill>
+                <a:latin typeface="Calibri"/>
+              </a:rPr>
+              <a:t>Container.xxx</a:t>
+            </a:r>
+            <a:r>
+              <a:rPr sz="1200" dirty="0">
+                <a:solidFill>
+                  <a:srgbClr val="B0C09A"/>
+                </a:solidFill>
+                <a:latin typeface="Calibri"/>
+              </a:rPr>
+              <a:t>] op page __</a:t>
+            </a:r>
+            <a:r>
+              <a:rPr sz="1200" dirty="0" err="1">
+                <a:solidFill>
+                  <a:srgbClr val="B0C09A"/>
+                </a:solidFill>
+                <a:latin typeface="Calibri"/>
+              </a:rPr>
+              <a:t>init</a:t>
+            </a:r>
+            <a:r>
+              <a:rPr sz="1200" dirty="0">
+                <a:solidFill>
+                  <a:srgbClr val="B0C09A"/>
+                </a:solidFill>
+                <a:latin typeface="Calibri"/>
+              </a:rPr>
+              <a:t>__</a:t>
             </a:r>
           </a:p>
         </p:txBody>

--- a/documentation/WarriorFit_Presentatie_10min_NL.pptx
+++ b/documentation/WarriorFit_Presentatie_10min_NL.pptx
@@ -319,7 +319,7 @@
           <a:p>
             <a:fld id="{5BCAD085-E8A6-8845-BD4E-CB4CCA059FC4}" type="datetimeFigureOut">
               <a:rPr lang="en-US" smtClean="0"/>
-              <a:t>6/14/26</a:t>
+              <a:t>6/15/26</a:t>
             </a:fld>
             <a:endParaRPr lang="en-US"/>
           </a:p>
@@ -487,7 +487,7 @@
           <a:p>
             <a:fld id="{5BCAD085-E8A6-8845-BD4E-CB4CCA059FC4}" type="datetimeFigureOut">
               <a:rPr lang="en-US" smtClean="0"/>
-              <a:t>6/14/26</a:t>
+              <a:t>6/15/26</a:t>
             </a:fld>
             <a:endParaRPr lang="en-US"/>
           </a:p>
@@ -665,7 +665,7 @@
           <a:p>
             <a:fld id="{5BCAD085-E8A6-8845-BD4E-CB4CCA059FC4}" type="datetimeFigureOut">
               <a:rPr lang="en-US" smtClean="0"/>
-              <a:t>6/14/26</a:t>
+              <a:t>6/15/26</a:t>
             </a:fld>
             <a:endParaRPr lang="en-US"/>
           </a:p>
@@ -833,7 +833,7 @@
           <a:p>
             <a:fld id="{5BCAD085-E8A6-8845-BD4E-CB4CCA059FC4}" type="datetimeFigureOut">
               <a:rPr lang="en-US" smtClean="0"/>
-              <a:t>6/14/26</a:t>
+              <a:t>6/15/26</a:t>
             </a:fld>
             <a:endParaRPr lang="en-US"/>
           </a:p>
@@ -1078,7 +1078,7 @@
           <a:p>
             <a:fld id="{5BCAD085-E8A6-8845-BD4E-CB4CCA059FC4}" type="datetimeFigureOut">
               <a:rPr lang="en-US" smtClean="0"/>
-              <a:t>6/14/26</a:t>
+              <a:t>6/15/26</a:t>
             </a:fld>
             <a:endParaRPr lang="en-US"/>
           </a:p>
@@ -1363,7 +1363,7 @@
           <a:p>
             <a:fld id="{5BCAD085-E8A6-8845-BD4E-CB4CCA059FC4}" type="datetimeFigureOut">
               <a:rPr lang="en-US" smtClean="0"/>
-              <a:t>6/14/26</a:t>
+              <a:t>6/15/26</a:t>
             </a:fld>
             <a:endParaRPr lang="en-US"/>
           </a:p>
@@ -1782,7 +1782,7 @@
           <a:p>
             <a:fld id="{5BCAD085-E8A6-8845-BD4E-CB4CCA059FC4}" type="datetimeFigureOut">
               <a:rPr lang="en-US" smtClean="0"/>
-              <a:t>6/14/26</a:t>
+              <a:t>6/15/26</a:t>
             </a:fld>
             <a:endParaRPr lang="en-US"/>
           </a:p>
@@ -1899,7 +1899,7 @@
           <a:p>
             <a:fld id="{5BCAD085-E8A6-8845-BD4E-CB4CCA059FC4}" type="datetimeFigureOut">
               <a:rPr lang="en-US" smtClean="0"/>
-              <a:t>6/14/26</a:t>
+              <a:t>6/15/26</a:t>
             </a:fld>
             <a:endParaRPr lang="en-US"/>
           </a:p>
@@ -1994,7 +1994,7 @@
           <a:p>
             <a:fld id="{5BCAD085-E8A6-8845-BD4E-CB4CCA059FC4}" type="datetimeFigureOut">
               <a:rPr lang="en-US" smtClean="0"/>
-              <a:t>6/14/26</a:t>
+              <a:t>6/15/26</a:t>
             </a:fld>
             <a:endParaRPr lang="en-US"/>
           </a:p>
@@ -2269,7 +2269,7 @@
           <a:p>
             <a:fld id="{5BCAD085-E8A6-8845-BD4E-CB4CCA059FC4}" type="datetimeFigureOut">
               <a:rPr lang="en-US" smtClean="0"/>
-              <a:t>6/14/26</a:t>
+              <a:t>6/15/26</a:t>
             </a:fld>
             <a:endParaRPr lang="en-US"/>
           </a:p>
@@ -2521,7 +2521,7 @@
           <a:p>
             <a:fld id="{5BCAD085-E8A6-8845-BD4E-CB4CCA059FC4}" type="datetimeFigureOut">
               <a:rPr lang="en-US" smtClean="0"/>
-              <a:t>6/14/26</a:t>
+              <a:t>6/15/26</a:t>
             </a:fld>
             <a:endParaRPr lang="en-US"/>
           </a:p>
@@ -2732,7 +2732,7 @@
           <a:p>
             <a:fld id="{5BCAD085-E8A6-8845-BD4E-CB4CCA059FC4}" type="datetimeFigureOut">
               <a:rPr lang="en-US" smtClean="0"/>
-              <a:t>6/14/26</a:t>
+              <a:t>6/15/26</a:t>
             </a:fld>
             <a:endParaRPr lang="en-US"/>
           </a:p>
@@ -17218,7 +17218,7 @@
         </p:nvSpPr>
         <p:spPr>
           <a:xfrm>
-            <a:off x="320040" y="713232"/>
+            <a:off x="320040" y="749808"/>
             <a:ext cx="11430000" cy="347472"/>
           </a:xfrm>
           <a:prstGeom prst="rect">
@@ -17254,7 +17254,7 @@
         <p:spPr>
           <a:xfrm>
             <a:off x="182880" y="1188720"/>
-            <a:ext cx="2103120" cy="475488"/>
+            <a:ext cx="1725664" cy="475488"/>
           </a:xfrm>
           <a:prstGeom prst="rect">
             <a:avLst/>
@@ -17298,7 +17298,7 @@
         <p:spPr>
           <a:xfrm>
             <a:off x="182880" y="1188720"/>
-            <a:ext cx="2103120" cy="475488"/>
+            <a:ext cx="1725664" cy="369332"/>
           </a:xfrm>
           <a:prstGeom prst="rect">
             <a:avLst/>
@@ -17333,7 +17333,7 @@
         <p:spPr>
           <a:xfrm>
             <a:off x="182880" y="1664208"/>
-            <a:ext cx="2103120" cy="2724912"/>
+            <a:ext cx="1725664" cy="2724912"/>
           </a:xfrm>
           <a:prstGeom prst="rect">
             <a:avLst/>
@@ -17377,7 +17377,7 @@
         <p:spPr>
           <a:xfrm>
             <a:off x="274320" y="1737360"/>
-            <a:ext cx="1920240" cy="2560320"/>
+            <a:ext cx="1575606" cy="1284967"/>
           </a:xfrm>
           <a:prstGeom prst="rect">
             <a:avLst/>
@@ -17464,7 +17464,7 @@
         <p:spPr>
           <a:xfrm>
             <a:off x="2432304" y="1188720"/>
-            <a:ext cx="2103120" cy="475488"/>
+            <a:ext cx="1725664" cy="475488"/>
           </a:xfrm>
           <a:prstGeom prst="rect">
             <a:avLst/>
@@ -17508,7 +17508,7 @@
         <p:spPr>
           <a:xfrm>
             <a:off x="2432304" y="1188720"/>
-            <a:ext cx="2103120" cy="475488"/>
+            <a:ext cx="1725664" cy="369332"/>
           </a:xfrm>
           <a:prstGeom prst="rect">
             <a:avLst/>
@@ -17523,7 +17523,7 @@
           <a:p>
             <a:pPr algn="ctr"/>
             <a:r>
-              <a:rPr sz="1800" b="1" i="0">
+              <a:rPr sz="1800" b="1" i="0" dirty="0" err="1">
                 <a:solidFill>
                   <a:srgbClr val="1E2D1E"/>
                 </a:solidFill>
@@ -17531,6 +17531,12 @@
               </a:rPr>
               <a:t>Functioneel</a:t>
             </a:r>
+            <a:endParaRPr sz="1800" b="1" i="0" dirty="0">
+              <a:solidFill>
+                <a:srgbClr val="1E2D1E"/>
+              </a:solidFill>
+              <a:latin typeface="Calibri"/>
+            </a:endParaRPr>
           </a:p>
         </p:txBody>
       </p:sp>
@@ -17543,7 +17549,7 @@
         <p:spPr>
           <a:xfrm>
             <a:off x="2432304" y="1664208"/>
-            <a:ext cx="2103120" cy="2724912"/>
+            <a:ext cx="1725664" cy="2724912"/>
           </a:xfrm>
           <a:prstGeom prst="rect">
             <a:avLst/>
@@ -17587,7 +17593,7 @@
         <p:spPr>
           <a:xfrm>
             <a:off x="2523744" y="1737360"/>
-            <a:ext cx="1920240" cy="2560320"/>
+            <a:ext cx="1575606" cy="1020792"/>
           </a:xfrm>
           <a:prstGeom prst="rect">
             <a:avLst/>
@@ -17657,8 +17663,8 @@
         </p:nvSpPr>
         <p:spPr>
           <a:xfrm>
-            <a:off x="4681728" y="1188720"/>
-            <a:ext cx="2103120" cy="475488"/>
+            <a:off x="4266919" y="1184383"/>
+            <a:ext cx="1725664" cy="475488"/>
           </a:xfrm>
           <a:prstGeom prst="rect">
             <a:avLst/>
@@ -17701,8 +17707,8 @@
         </p:nvSpPr>
         <p:spPr>
           <a:xfrm>
-            <a:off x="4681728" y="1188720"/>
-            <a:ext cx="2103120" cy="475488"/>
+            <a:off x="4266919" y="1184383"/>
+            <a:ext cx="1725664" cy="369332"/>
           </a:xfrm>
           <a:prstGeom prst="rect">
             <a:avLst/>
@@ -17736,8 +17742,8 @@
         </p:nvSpPr>
         <p:spPr>
           <a:xfrm>
-            <a:off x="4681728" y="1664208"/>
-            <a:ext cx="2103120" cy="2724912"/>
+            <a:off x="4266919" y="1659871"/>
+            <a:ext cx="1725664" cy="2724912"/>
           </a:xfrm>
           <a:prstGeom prst="rect">
             <a:avLst/>
@@ -17780,8 +17786,8 @@
         </p:nvSpPr>
         <p:spPr>
           <a:xfrm>
-            <a:off x="4773168" y="1737360"/>
-            <a:ext cx="1920240" cy="2560320"/>
+            <a:off x="4358359" y="1733023"/>
+            <a:ext cx="1575606" cy="1020792"/>
           </a:xfrm>
           <a:prstGeom prst="rect">
             <a:avLst/>
@@ -17851,8 +17857,8 @@
         </p:nvSpPr>
         <p:spPr>
           <a:xfrm>
-            <a:off x="6931152" y="1188720"/>
-            <a:ext cx="2103120" cy="475488"/>
+            <a:off x="6114040" y="1184383"/>
+            <a:ext cx="1725664" cy="475488"/>
           </a:xfrm>
           <a:prstGeom prst="rect">
             <a:avLst/>
@@ -17895,8 +17901,8 @@
         </p:nvSpPr>
         <p:spPr>
           <a:xfrm>
-            <a:off x="6931152" y="1188720"/>
-            <a:ext cx="2103120" cy="475488"/>
+            <a:off x="6114040" y="1184383"/>
+            <a:ext cx="1725664" cy="369332"/>
           </a:xfrm>
           <a:prstGeom prst="rect">
             <a:avLst/>
@@ -17930,8 +17936,8 @@
         </p:nvSpPr>
         <p:spPr>
           <a:xfrm>
-            <a:off x="6931152" y="1664208"/>
-            <a:ext cx="2103120" cy="2724912"/>
+            <a:off x="6114040" y="1659871"/>
+            <a:ext cx="1725664" cy="2724912"/>
           </a:xfrm>
           <a:prstGeom prst="rect">
             <a:avLst/>
@@ -17974,8 +17980,8 @@
         </p:nvSpPr>
         <p:spPr>
           <a:xfrm>
-            <a:off x="7022592" y="1737360"/>
-            <a:ext cx="1920240" cy="2560320"/>
+            <a:off x="6205480" y="1733023"/>
+            <a:ext cx="1575606" cy="1020792"/>
           </a:xfrm>
           <a:prstGeom prst="rect">
             <a:avLst/>
@@ -18045,8 +18051,8 @@
         </p:nvSpPr>
         <p:spPr>
           <a:xfrm>
-            <a:off x="9180576" y="1188720"/>
-            <a:ext cx="2103120" cy="475488"/>
+            <a:off x="7931144" y="1170432"/>
+            <a:ext cx="1725664" cy="475488"/>
           </a:xfrm>
           <a:prstGeom prst="rect">
             <a:avLst/>
@@ -18089,8 +18095,8 @@
         </p:nvSpPr>
         <p:spPr>
           <a:xfrm>
-            <a:off x="9180576" y="1188720"/>
-            <a:ext cx="2103120" cy="475488"/>
+            <a:off x="7931144" y="1170432"/>
+            <a:ext cx="1725664" cy="369332"/>
           </a:xfrm>
           <a:prstGeom prst="rect">
             <a:avLst/>
@@ -18124,8 +18130,8 @@
         </p:nvSpPr>
         <p:spPr>
           <a:xfrm>
-            <a:off x="9180576" y="1664208"/>
-            <a:ext cx="2103120" cy="2724912"/>
+            <a:off x="7931144" y="1645920"/>
+            <a:ext cx="1725664" cy="2724912"/>
           </a:xfrm>
           <a:prstGeom prst="rect">
             <a:avLst/>
@@ -18168,8 +18174,8 @@
         </p:nvSpPr>
         <p:spPr>
           <a:xfrm>
-            <a:off x="9272016" y="1737360"/>
-            <a:ext cx="1920240" cy="2560320"/>
+            <a:off x="8022584" y="1719072"/>
+            <a:ext cx="1575606" cy="1420902"/>
           </a:xfrm>
           <a:prstGeom prst="rect">
             <a:avLst/>
@@ -18282,8 +18288,8 @@
         </p:blipFill>
         <p:spPr>
           <a:xfrm>
-            <a:off x="274320" y="4892040"/>
-            <a:ext cx="2863761" cy="2651760"/>
+            <a:off x="274321" y="4892040"/>
+            <a:ext cx="2006364" cy="1857835"/>
           </a:xfrm>
           <a:prstGeom prst="rect">
             <a:avLst/>
@@ -18298,8 +18304,8 @@
         </p:nvSpPr>
         <p:spPr>
           <a:xfrm>
-            <a:off x="6126480" y="4572000"/>
-            <a:ext cx="5852160" cy="2103120"/>
+            <a:off x="4267117" y="4833728"/>
+            <a:ext cx="3535845" cy="1349087"/>
           </a:xfrm>
           <a:prstGeom prst="rect">
             <a:avLst/>
@@ -18393,6 +18399,263 @@
           </a:p>
         </p:txBody>
       </p:sp>
+      <p:sp>
+        <p:nvSpPr>
+          <p:cNvPr id="29" name="Rectangle 28">
+            <a:extLst>
+              <a:ext uri="{FF2B5EF4-FFF2-40B4-BE49-F238E27FC236}">
+                <a16:creationId xmlns:a16="http://schemas.microsoft.com/office/drawing/2014/main" id="{CCFC85BB-C0C5-7DE1-5A03-5450DB1A13A8}"/>
+              </a:ext>
+            </a:extLst>
+          </p:cNvPr>
+          <p:cNvSpPr/>
+          <p:nvPr/>
+        </p:nvSpPr>
+        <p:spPr>
+          <a:xfrm>
+            <a:off x="9828598" y="1170432"/>
+            <a:ext cx="1725664" cy="475488"/>
+          </a:xfrm>
+          <a:prstGeom prst="rect">
+            <a:avLst/>
+          </a:prstGeom>
+          <a:solidFill>
+            <a:srgbClr val="8E44AD"/>
+          </a:solidFill>
+          <a:ln>
+            <a:noFill/>
+          </a:ln>
+        </p:spPr>
+        <p:style>
+          <a:lnRef idx="1">
+            <a:schemeClr val="accent1"/>
+          </a:lnRef>
+          <a:fillRef idx="3">
+            <a:schemeClr val="accent1"/>
+          </a:fillRef>
+          <a:effectRef idx="2">
+            <a:schemeClr val="accent1"/>
+          </a:effectRef>
+          <a:fontRef idx="minor">
+            <a:schemeClr val="lt1"/>
+          </a:fontRef>
+        </p:style>
+        <p:txBody>
+          <a:bodyPr rtlCol="0" anchor="ctr"/>
+          <a:lstStyle/>
+          <a:p>
+            <a:pPr algn="ctr"/>
+            <a:endParaRPr/>
+          </a:p>
+        </p:txBody>
+      </p:sp>
+      <p:sp>
+        <p:nvSpPr>
+          <p:cNvPr id="30" name="TextBox 29">
+            <a:extLst>
+              <a:ext uri="{FF2B5EF4-FFF2-40B4-BE49-F238E27FC236}">
+                <a16:creationId xmlns:a16="http://schemas.microsoft.com/office/drawing/2014/main" id="{8F3F9E0D-E8F6-1AAC-08A0-45679D15F90D}"/>
+              </a:ext>
+            </a:extLst>
+          </p:cNvPr>
+          <p:cNvSpPr txBox="1"/>
+          <p:nvPr/>
+        </p:nvSpPr>
+        <p:spPr>
+          <a:xfrm>
+            <a:off x="9828598" y="1170432"/>
+            <a:ext cx="1725664" cy="369332"/>
+          </a:xfrm>
+          <a:prstGeom prst="rect">
+            <a:avLst/>
+          </a:prstGeom>
+          <a:noFill/>
+        </p:spPr>
+        <p:txBody>
+          <a:bodyPr wrap="square">
+            <a:spAutoFit/>
+          </a:bodyPr>
+          <a:lstStyle/>
+          <a:p>
+            <a:pPr algn="ctr"/>
+            <a:r>
+              <a:rPr lang="en-US" sz="1800" b="1" i="0" dirty="0">
+                <a:solidFill>
+                  <a:srgbClr val="1E2D1E"/>
+                </a:solidFill>
+                <a:latin typeface="Calibri"/>
+              </a:rPr>
+              <a:t>MFTT</a:t>
+            </a:r>
+            <a:endParaRPr sz="1800" b="1" i="0" dirty="0">
+              <a:solidFill>
+                <a:srgbClr val="1E2D1E"/>
+              </a:solidFill>
+              <a:latin typeface="Calibri"/>
+            </a:endParaRPr>
+          </a:p>
+        </p:txBody>
+      </p:sp>
+      <p:sp>
+        <p:nvSpPr>
+          <p:cNvPr id="31" name="Rectangle 30">
+            <a:extLst>
+              <a:ext uri="{FF2B5EF4-FFF2-40B4-BE49-F238E27FC236}">
+                <a16:creationId xmlns:a16="http://schemas.microsoft.com/office/drawing/2014/main" id="{4B4C01CA-8B65-F1C1-D038-EE0FD8A6D5C7}"/>
+              </a:ext>
+            </a:extLst>
+          </p:cNvPr>
+          <p:cNvSpPr/>
+          <p:nvPr/>
+        </p:nvSpPr>
+        <p:spPr>
+          <a:xfrm>
+            <a:off x="9828598" y="1645920"/>
+            <a:ext cx="1725664" cy="2724912"/>
+          </a:xfrm>
+          <a:prstGeom prst="rect">
+            <a:avLst/>
+          </a:prstGeom>
+          <a:solidFill>
+            <a:srgbClr val="2A402A"/>
+          </a:solidFill>
+          <a:ln>
+            <a:noFill/>
+          </a:ln>
+        </p:spPr>
+        <p:style>
+          <a:lnRef idx="1">
+            <a:schemeClr val="accent1"/>
+          </a:lnRef>
+          <a:fillRef idx="3">
+            <a:schemeClr val="accent1"/>
+          </a:fillRef>
+          <a:effectRef idx="2">
+            <a:schemeClr val="accent1"/>
+          </a:effectRef>
+          <a:fontRef idx="minor">
+            <a:schemeClr val="lt1"/>
+          </a:fontRef>
+        </p:style>
+        <p:txBody>
+          <a:bodyPr rtlCol="0" anchor="ctr"/>
+          <a:lstStyle/>
+          <a:p>
+            <a:pPr algn="ctr"/>
+            <a:endParaRPr/>
+          </a:p>
+        </p:txBody>
+      </p:sp>
+      <p:sp>
+        <p:nvSpPr>
+          <p:cNvPr id="32" name="TextBox 31">
+            <a:extLst>
+              <a:ext uri="{FF2B5EF4-FFF2-40B4-BE49-F238E27FC236}">
+                <a16:creationId xmlns:a16="http://schemas.microsoft.com/office/drawing/2014/main" id="{A6C6F7B2-1D77-3FB1-E96A-CF29074F2C6D}"/>
+              </a:ext>
+            </a:extLst>
+          </p:cNvPr>
+          <p:cNvSpPr txBox="1"/>
+          <p:nvPr/>
+        </p:nvSpPr>
+        <p:spPr>
+          <a:xfrm>
+            <a:off x="9920038" y="1719072"/>
+            <a:ext cx="1575606" cy="987450"/>
+          </a:xfrm>
+          <a:prstGeom prst="rect">
+            <a:avLst/>
+          </a:prstGeom>
+          <a:noFill/>
+        </p:spPr>
+        <p:txBody>
+          <a:bodyPr wrap="square">
+            <a:spAutoFit/>
+          </a:bodyPr>
+          <a:lstStyle/>
+          <a:p>
+            <a:pPr>
+              <a:spcAft>
+                <a:spcPts val="500"/>
+              </a:spcAft>
+            </a:pPr>
+            <a:r>
+              <a:rPr lang="nl-BE" sz="1400" dirty="0">
+                <a:solidFill>
+                  <a:schemeClr val="bg1"/>
+                </a:solidFill>
+              </a:rPr>
+              <a:t>Military Functional Fitness Training</a:t>
+            </a:r>
+            <a:r>
+              <a:rPr lang="en-BE" sz="1100" dirty="0">
+                <a:solidFill>
+                  <a:schemeClr val="bg1"/>
+                </a:solidFill>
+              </a:rPr>
+              <a:t> </a:t>
+            </a:r>
+            <a:endParaRPr lang="en-US" sz="1100" dirty="0">
+              <a:solidFill>
+                <a:schemeClr val="bg1"/>
+              </a:solidFill>
+              <a:latin typeface="Calibri"/>
+            </a:endParaRPr>
+          </a:p>
+          <a:p>
+            <a:pPr algn="l">
+              <a:spcAft>
+                <a:spcPts val="500"/>
+              </a:spcAft>
+            </a:pPr>
+            <a:r>
+              <a:rPr lang="en-US" sz="1300" dirty="0">
+                <a:solidFill>
+                  <a:srgbClr val="B0C09A"/>
+                </a:solidFill>
+                <a:latin typeface="Calibri"/>
+              </a:rPr>
+              <a:t>NIEUWE TESTEN 2026</a:t>
+            </a:r>
+            <a:endParaRPr sz="1300" dirty="0">
+              <a:solidFill>
+                <a:srgbClr val="B0C09A"/>
+              </a:solidFill>
+              <a:latin typeface="Calibri"/>
+            </a:endParaRPr>
+          </a:p>
+        </p:txBody>
+      </p:sp>
+      <p:pic>
+        <p:nvPicPr>
+          <p:cNvPr id="34" name="Picture 33">
+            <a:extLst>
+              <a:ext uri="{FF2B5EF4-FFF2-40B4-BE49-F238E27FC236}">
+                <a16:creationId xmlns:a16="http://schemas.microsoft.com/office/drawing/2014/main" id="{EFD9373D-CB91-D997-1FBC-8E379EE915F6}"/>
+              </a:ext>
+            </a:extLst>
+          </p:cNvPr>
+          <p:cNvPicPr>
+            <a:picLocks noChangeAspect="1"/>
+          </p:cNvPicPr>
+          <p:nvPr/>
+        </p:nvPicPr>
+        <p:blipFill>
+          <a:blip r:embed="rId3"/>
+          <a:stretch>
+            <a:fillRect/>
+          </a:stretch>
+        </p:blipFill>
+        <p:spPr>
+          <a:xfrm>
+            <a:off x="8490162" y="4660102"/>
+            <a:ext cx="2333292" cy="2197898"/>
+          </a:xfrm>
+          <a:prstGeom prst="rect">
+            <a:avLst/>
+          </a:prstGeom>
+        </p:spPr>
+      </p:pic>
     </p:spTree>
   </p:cSld>
   <p:clrMapOvr>
